--- a/.lessons/25 Fundamental HTTP Session/5 Flash Session Data/1.pptx
+++ b/.lessons/25 Fundamental HTTP Session/5 Flash Session Data/1.pptx
@@ -8,6 +8,8 @@
     <p:sldId id="402" r:id="rId2"/>
     <p:sldId id="403" r:id="rId3"/>
     <p:sldId id="400" r:id="rId4"/>
+    <p:sldId id="404" r:id="rId5"/>
+    <p:sldId id="405" r:id="rId6"/>
   </p:sldIdLst>
   <p:sldSz cx="12192000" cy="6858000"/>
   <p:notesSz cx="6858000" cy="9144000"/>
@@ -114,6 +116,34 @@
 </p:presentation>
 </file>
 
+<file path=ppt/ink/ink1.xml><?xml version="1.0" encoding="utf-8"?>
+<inkml:ink xmlns:inkml="http://www.w3.org/2003/InkML">
+  <inkml:definitions>
+    <inkml:context xml:id="ctx0">
+      <inkml:inkSource xml:id="inkSrc0">
+        <inkml:traceFormat>
+          <inkml:channel name="X" type="integer" min="-2.14748E9" max="2.14748E9" units="cm"/>
+          <inkml:channel name="Y" type="integer" min="-2.14748E9" max="2.14748E9" units="cm"/>
+          <inkml:channel name="F" type="integer" max="32767" units="dev"/>
+        </inkml:traceFormat>
+        <inkml:channelProperties>
+          <inkml:channelProperty channel="X" name="resolution" value="1000" units="1/cm"/>
+          <inkml:channelProperty channel="Y" name="resolution" value="1000" units="1/cm"/>
+          <inkml:channelProperty channel="F" name="resolution" value="0" units="1/dev"/>
+        </inkml:channelProperties>
+      </inkml:inkSource>
+      <inkml:timestamp xml:id="ts0" timeString="2025-05-27T15:14:48.784"/>
+    </inkml:context>
+    <inkml:brush xml:id="br0">
+      <inkml:brushProperty name="width" value="0.035" units="cm"/>
+      <inkml:brushProperty name="height" value="0.035" units="cm"/>
+      <inkml:brushProperty name="color" value="#E71224"/>
+    </inkml:brush>
+  </inkml:definitions>
+  <inkml:trace contextRef="#ctx0" brushRef="#br0">0 0 24518,'0'641'0,"641"-641"0,-641-641 0,-641 641 0</inkml:trace>
+</inkml:ink>
+</file>
+
 <file path=ppt/slideLayouts/slideLayout1.xml><?xml version="1.0" encoding="utf-8"?>
 <p:sldLayout xmlns:a="http://schemas.openxmlformats.org/drawingml/2006/main" xmlns:r="http://schemas.openxmlformats.org/officeDocument/2006/relationships" xmlns:p="http://schemas.openxmlformats.org/presentationml/2006/main" type="title" preserve="1">
   <p:cSld name="Title Slide">
@@ -261,7 +291,7 @@
           <a:p>
             <a:fld id="{3E102D2E-813C-461C-9963-687A650C48C0}" type="datetimeFigureOut">
               <a:rPr lang="en-US" smtClean="0"/>
-              <a:t>5/23/2025</a:t>
+              <a:t>5/27/2025</a:t>
             </a:fld>
             <a:endParaRPr lang="en-US"/>
           </a:p>
@@ -459,7 +489,7 @@
           <a:p>
             <a:fld id="{3E102D2E-813C-461C-9963-687A650C48C0}" type="datetimeFigureOut">
               <a:rPr lang="en-US" smtClean="0"/>
-              <a:t>5/23/2025</a:t>
+              <a:t>5/27/2025</a:t>
             </a:fld>
             <a:endParaRPr lang="en-US"/>
           </a:p>
@@ -667,7 +697,7 @@
           <a:p>
             <a:fld id="{3E102D2E-813C-461C-9963-687A650C48C0}" type="datetimeFigureOut">
               <a:rPr lang="en-US" smtClean="0"/>
-              <a:t>5/23/2025</a:t>
+              <a:t>5/27/2025</a:t>
             </a:fld>
             <a:endParaRPr lang="en-US"/>
           </a:p>
@@ -865,7 +895,7 @@
           <a:p>
             <a:fld id="{3E102D2E-813C-461C-9963-687A650C48C0}" type="datetimeFigureOut">
               <a:rPr lang="en-US" smtClean="0"/>
-              <a:t>5/23/2025</a:t>
+              <a:t>5/27/2025</a:t>
             </a:fld>
             <a:endParaRPr lang="en-US"/>
           </a:p>
@@ -1140,7 +1170,7 @@
           <a:p>
             <a:fld id="{3E102D2E-813C-461C-9963-687A650C48C0}" type="datetimeFigureOut">
               <a:rPr lang="en-US" smtClean="0"/>
-              <a:t>5/23/2025</a:t>
+              <a:t>5/27/2025</a:t>
             </a:fld>
             <a:endParaRPr lang="en-US"/>
           </a:p>
@@ -1405,7 +1435,7 @@
           <a:p>
             <a:fld id="{3E102D2E-813C-461C-9963-687A650C48C0}" type="datetimeFigureOut">
               <a:rPr lang="en-US" smtClean="0"/>
-              <a:t>5/23/2025</a:t>
+              <a:t>5/27/2025</a:t>
             </a:fld>
             <a:endParaRPr lang="en-US"/>
           </a:p>
@@ -1817,7 +1847,7 @@
           <a:p>
             <a:fld id="{3E102D2E-813C-461C-9963-687A650C48C0}" type="datetimeFigureOut">
               <a:rPr lang="en-US" smtClean="0"/>
-              <a:t>5/23/2025</a:t>
+              <a:t>5/27/2025</a:t>
             </a:fld>
             <a:endParaRPr lang="en-US"/>
           </a:p>
@@ -1958,7 +1988,7 @@
           <a:p>
             <a:fld id="{3E102D2E-813C-461C-9963-687A650C48C0}" type="datetimeFigureOut">
               <a:rPr lang="en-US" smtClean="0"/>
-              <a:t>5/23/2025</a:t>
+              <a:t>5/27/2025</a:t>
             </a:fld>
             <a:endParaRPr lang="en-US"/>
           </a:p>
@@ -2071,7 +2101,7 @@
           <a:p>
             <a:fld id="{3E102D2E-813C-461C-9963-687A650C48C0}" type="datetimeFigureOut">
               <a:rPr lang="en-US" smtClean="0"/>
-              <a:t>5/23/2025</a:t>
+              <a:t>5/27/2025</a:t>
             </a:fld>
             <a:endParaRPr lang="en-US"/>
           </a:p>
@@ -2382,7 +2412,7 @@
           <a:p>
             <a:fld id="{3E102D2E-813C-461C-9963-687A650C48C0}" type="datetimeFigureOut">
               <a:rPr lang="en-US" smtClean="0"/>
-              <a:t>5/23/2025</a:t>
+              <a:t>5/27/2025</a:t>
             </a:fld>
             <a:endParaRPr lang="en-US"/>
           </a:p>
@@ -2670,7 +2700,7 @@
           <a:p>
             <a:fld id="{3E102D2E-813C-461C-9963-687A650C48C0}" type="datetimeFigureOut">
               <a:rPr lang="en-US" smtClean="0"/>
-              <a:t>5/23/2025</a:t>
+              <a:t>5/27/2025</a:t>
             </a:fld>
             <a:endParaRPr lang="en-US"/>
           </a:p>
@@ -2911,7 +2941,7 @@
           <a:p>
             <a:fld id="{3E102D2E-813C-461C-9963-687A650C48C0}" type="datetimeFigureOut">
               <a:rPr lang="en-US" smtClean="0"/>
-              <a:t>5/23/2025</a:t>
+              <a:t>5/27/2025</a:t>
             </a:fld>
             <a:endParaRPr lang="en-US"/>
           </a:p>
@@ -3349,7 +3379,7 @@
         <p:spPr>
           <a:xfrm>
             <a:off x="217714" y="255046"/>
-            <a:ext cx="11756571" cy="355354"/>
+            <a:ext cx="3732117" cy="2825261"/>
           </a:xfrm>
           <a:prstGeom prst="rect">
             <a:avLst/>
@@ -3368,6 +3398,68 @@
               </a:lnSpc>
               <a:buNone/>
             </a:pPr>
+            <a:r>
+              <a:rPr lang="en-US" sz="1400" b="1">
+                <a:solidFill>
+                  <a:srgbClr val="FF0000"/>
+                </a:solidFill>
+              </a:rPr>
+              <a:t>Flash Session Data nədir</a:t>
+            </a:r>
+            <a:r>
+              <a:rPr lang="en-US" sz="1400"/>
+              <a:t>?</a:t>
+            </a:r>
+          </a:p>
+          <a:p>
+            <a:pPr>
+              <a:lnSpc>
+                <a:spcPct val="150000"/>
+              </a:lnSpc>
+              <a:buNone/>
+            </a:pPr>
+            <a:endParaRPr kumimoji="0" lang="en-US" altLang="en-US" sz="1400" b="0" i="0" u="none" strike="noStrike" cap="none" normalizeH="0" baseline="0">
+              <a:ln>
+                <a:noFill/>
+              </a:ln>
+              <a:solidFill>
+                <a:schemeClr val="tx1"/>
+              </a:solidFill>
+              <a:effectLst/>
+              <a:latin typeface="Arial" panose="020B0604020202020204" pitchFamily="34" charset="0"/>
+            </a:endParaRPr>
+          </a:p>
+          <a:p>
+            <a:pPr>
+              <a:lnSpc>
+                <a:spcPct val="150000"/>
+              </a:lnSpc>
+              <a:buNone/>
+            </a:pPr>
+            <a:endParaRPr lang="en-US" altLang="en-US" sz="1400">
+              <a:latin typeface="Arial" panose="020B0604020202020204" pitchFamily="34" charset="0"/>
+            </a:endParaRPr>
+          </a:p>
+          <a:p>
+            <a:pPr>
+              <a:lnSpc>
+                <a:spcPct val="150000"/>
+              </a:lnSpc>
+              <a:buNone/>
+            </a:pPr>
+            <a:r>
+              <a:rPr kumimoji="0" lang="en-US" altLang="en-US" sz="1300" b="1" i="0" u="none" strike="noStrike" cap="none" normalizeH="0" baseline="0">
+                <a:ln>
+                  <a:noFill/>
+                </a:ln>
+                <a:solidFill>
+                  <a:schemeClr val="tx1"/>
+                </a:solidFill>
+                <a:effectLst/>
+                <a:latin typeface="Arial" panose="020B0604020202020204" pitchFamily="34" charset="0"/>
+              </a:rPr>
+              <a:t>Flash</a:t>
+            </a:r>
             <a:r>
               <a:rPr kumimoji="0" lang="en-US" altLang="en-US" sz="1300" b="0" i="0" u="none" strike="noStrike" cap="none" normalizeH="0" baseline="0">
                 <a:ln>
@@ -3379,11 +3471,465 @@
                 <a:effectLst/>
                 <a:latin typeface="Arial" panose="020B0604020202020204" pitchFamily="34" charset="0"/>
               </a:rPr>
-              <a:t>.</a:t>
-            </a:r>
-          </a:p>
-        </p:txBody>
-      </p:sp>
+              <a:t> data sessiyada yalnız bir dəfəlik saxlanılan məlumatdır. Laravel-də </a:t>
+            </a:r>
+            <a:r>
+              <a:rPr kumimoji="0" lang="en-US" altLang="en-US" sz="1300" b="1" i="0" u="none" strike="noStrike" cap="none" normalizeH="0" baseline="0">
+                <a:ln>
+                  <a:noFill/>
+                </a:ln>
+                <a:solidFill>
+                  <a:schemeClr val="tx1"/>
+                </a:solidFill>
+                <a:effectLst/>
+                <a:latin typeface="Arial" panose="020B0604020202020204" pitchFamily="34" charset="0"/>
+              </a:rPr>
+              <a:t>flash() </a:t>
+            </a:r>
+            <a:r>
+              <a:rPr kumimoji="0" lang="en-US" altLang="en-US" sz="1300" b="0" i="0" u="none" strike="noStrike" cap="none" normalizeH="0" baseline="0">
+                <a:ln>
+                  <a:noFill/>
+                </a:ln>
+                <a:solidFill>
+                  <a:schemeClr val="tx1"/>
+                </a:solidFill>
+                <a:effectLst/>
+                <a:latin typeface="Arial" panose="020B0604020202020204" pitchFamily="34" charset="0"/>
+              </a:rPr>
+              <a:t>metodu ilə sessiyaya məlumat əlavə etdikdə, o məlumat yalnız </a:t>
+            </a:r>
+            <a:r>
+              <a:rPr kumimoji="0" lang="en-US" altLang="en-US" sz="1300" b="1" i="0" u="none" strike="noStrike" cap="none" normalizeH="0" baseline="0">
+                <a:ln>
+                  <a:noFill/>
+                </a:ln>
+                <a:solidFill>
+                  <a:schemeClr val="tx1"/>
+                </a:solidFill>
+                <a:effectLst/>
+                <a:latin typeface="Arial" panose="020B0604020202020204" pitchFamily="34" charset="0"/>
+              </a:rPr>
+              <a:t>növbəti request </a:t>
+            </a:r>
+            <a:r>
+              <a:rPr kumimoji="0" lang="en-US" altLang="en-US" sz="1300" b="0" i="0" u="none" strike="noStrike" cap="none" normalizeH="0" baseline="0">
+                <a:ln>
+                  <a:noFill/>
+                </a:ln>
+                <a:solidFill>
+                  <a:schemeClr val="tx1"/>
+                </a:solidFill>
+                <a:effectLst/>
+                <a:latin typeface="Arial" panose="020B0604020202020204" pitchFamily="34" charset="0"/>
+              </a:rPr>
+              <a:t>(yəni növbəti səhifə yüklənməsi) üçün mövcud olur. Daha sonra avtomatik silinir.</a:t>
+            </a:r>
+          </a:p>
+        </p:txBody>
+      </p:sp>
+      <p:pic>
+        <p:nvPicPr>
+          <p:cNvPr id="8" name="Picture 7">
+            <a:extLst>
+              <a:ext uri="{FF2B5EF4-FFF2-40B4-BE49-F238E27FC236}">
+                <a16:creationId xmlns:a16="http://schemas.microsoft.com/office/drawing/2014/main" id="{D2804207-BCCF-1D40-3313-4594A566DEFB}"/>
+              </a:ext>
+            </a:extLst>
+          </p:cNvPr>
+          <p:cNvPicPr>
+            <a:picLocks noChangeAspect="1"/>
+          </p:cNvPicPr>
+          <p:nvPr/>
+        </p:nvPicPr>
+        <p:blipFill>
+          <a:blip r:embed="rId2"/>
+          <a:stretch>
+            <a:fillRect/>
+          </a:stretch>
+        </p:blipFill>
+        <p:spPr>
+          <a:xfrm>
+            <a:off x="7717386" y="0"/>
+            <a:ext cx="4474614" cy="6858000"/>
+          </a:xfrm>
+          <a:prstGeom prst="rect">
+            <a:avLst/>
+          </a:prstGeom>
+        </p:spPr>
+      </p:pic>
+      <p:grpSp>
+        <p:nvGrpSpPr>
+          <p:cNvPr id="24" name="Group 23">
+            <a:extLst>
+              <a:ext uri="{FF2B5EF4-FFF2-40B4-BE49-F238E27FC236}">
+                <a16:creationId xmlns:a16="http://schemas.microsoft.com/office/drawing/2014/main" id="{CA50681B-E665-AEFD-B080-275D4D2C14EA}"/>
+              </a:ext>
+            </a:extLst>
+          </p:cNvPr>
+          <p:cNvGrpSpPr/>
+          <p:nvPr/>
+        </p:nvGrpSpPr>
+        <p:grpSpPr>
+          <a:xfrm>
+            <a:off x="4139265" y="635728"/>
+            <a:ext cx="3086818" cy="6222272"/>
+            <a:chOff x="4139265" y="635728"/>
+            <a:chExt cx="3086818" cy="6222272"/>
+          </a:xfrm>
+        </p:grpSpPr>
+        <p:sp>
+          <p:nvSpPr>
+            <p:cNvPr id="18" name="Arrow: Down 17">
+              <a:extLst>
+                <a:ext uri="{FF2B5EF4-FFF2-40B4-BE49-F238E27FC236}">
+                  <a16:creationId xmlns:a16="http://schemas.microsoft.com/office/drawing/2014/main" id="{A0868A4B-211E-0A90-017E-8185563B8437}"/>
+                </a:ext>
+              </a:extLst>
+            </p:cNvPr>
+            <p:cNvSpPr/>
+            <p:nvPr/>
+          </p:nvSpPr>
+          <p:spPr>
+            <a:xfrm>
+              <a:off x="5533534" y="3842449"/>
+              <a:ext cx="329938" cy="310789"/>
+            </a:xfrm>
+            <a:prstGeom prst="downArrow">
+              <a:avLst/>
+            </a:prstGeom>
+          </p:spPr>
+          <p:style>
+            <a:lnRef idx="2">
+              <a:schemeClr val="dk1">
+                <a:shade val="15000"/>
+              </a:schemeClr>
+            </a:lnRef>
+            <a:fillRef idx="1">
+              <a:schemeClr val="dk1"/>
+            </a:fillRef>
+            <a:effectRef idx="0">
+              <a:schemeClr val="dk1"/>
+            </a:effectRef>
+            <a:fontRef idx="minor">
+              <a:schemeClr val="lt1"/>
+            </a:fontRef>
+          </p:style>
+          <p:txBody>
+            <a:bodyPr rtlCol="0" anchor="ctr"/>
+            <a:lstStyle/>
+            <a:p>
+              <a:pPr algn="ctr"/>
+              <a:endParaRPr lang="en-US"/>
+            </a:p>
+          </p:txBody>
+        </p:sp>
+        <p:grpSp>
+          <p:nvGrpSpPr>
+            <p:cNvPr id="23" name="Group 22">
+              <a:extLst>
+                <a:ext uri="{FF2B5EF4-FFF2-40B4-BE49-F238E27FC236}">
+                  <a16:creationId xmlns:a16="http://schemas.microsoft.com/office/drawing/2014/main" id="{7B0880B8-54F4-81BB-BC98-A2FD8D9B72B2}"/>
+                </a:ext>
+              </a:extLst>
+            </p:cNvPr>
+            <p:cNvGrpSpPr/>
+            <p:nvPr/>
+          </p:nvGrpSpPr>
+          <p:grpSpPr>
+            <a:xfrm>
+              <a:off x="4139265" y="635728"/>
+              <a:ext cx="3086818" cy="6222272"/>
+              <a:chOff x="3790473" y="635728"/>
+              <a:chExt cx="3086818" cy="6222272"/>
+            </a:xfrm>
+          </p:grpSpPr>
+          <p:grpSp>
+            <p:nvGrpSpPr>
+              <p:cNvPr id="20" name="Group 19">
+                <a:extLst>
+                  <a:ext uri="{FF2B5EF4-FFF2-40B4-BE49-F238E27FC236}">
+                    <a16:creationId xmlns:a16="http://schemas.microsoft.com/office/drawing/2014/main" id="{FC05DCC0-DC2C-5A16-D70F-F7984F0D3455}"/>
+                  </a:ext>
+                </a:extLst>
+              </p:cNvPr>
+              <p:cNvGrpSpPr/>
+              <p:nvPr/>
+            </p:nvGrpSpPr>
+            <p:grpSpPr>
+              <a:xfrm>
+                <a:off x="3790473" y="635728"/>
+                <a:ext cx="3086818" cy="6222272"/>
+                <a:chOff x="3790473" y="635728"/>
+                <a:chExt cx="3086818" cy="6222272"/>
+              </a:xfrm>
+            </p:grpSpPr>
+            <p:pic>
+              <p:nvPicPr>
+                <p:cNvPr id="10" name="Picture 9">
+                  <a:extLst>
+                    <a:ext uri="{FF2B5EF4-FFF2-40B4-BE49-F238E27FC236}">
+                      <a16:creationId xmlns:a16="http://schemas.microsoft.com/office/drawing/2014/main" id="{9902AAA5-6739-D30E-2657-9B66F8ADD255}"/>
+                    </a:ext>
+                  </a:extLst>
+                </p:cNvPr>
+                <p:cNvPicPr>
+                  <a:picLocks noChangeAspect="1"/>
+                </p:cNvPicPr>
+                <p:nvPr/>
+              </p:nvPicPr>
+              <p:blipFill>
+                <a:blip r:embed="rId3"/>
+                <a:stretch>
+                  <a:fillRect/>
+                </a:stretch>
+              </p:blipFill>
+              <p:spPr>
+                <a:xfrm>
+                  <a:off x="3790473" y="635728"/>
+                  <a:ext cx="3043960" cy="605837"/>
+                </a:xfrm>
+                <a:prstGeom prst="rect">
+                  <a:avLst/>
+                </a:prstGeom>
+              </p:spPr>
+            </p:pic>
+            <p:pic>
+              <p:nvPicPr>
+                <p:cNvPr id="12" name="Picture 11">
+                  <a:extLst>
+                    <a:ext uri="{FF2B5EF4-FFF2-40B4-BE49-F238E27FC236}">
+                      <a16:creationId xmlns:a16="http://schemas.microsoft.com/office/drawing/2014/main" id="{B8D80D64-8765-F61E-A383-C34CF14E98D2}"/>
+                    </a:ext>
+                  </a:extLst>
+                </p:cNvPr>
+                <p:cNvPicPr>
+                  <a:picLocks noChangeAspect="1"/>
+                </p:cNvPicPr>
+                <p:nvPr/>
+              </p:nvPicPr>
+              <p:blipFill>
+                <a:blip r:embed="rId4"/>
+                <a:stretch>
+                  <a:fillRect/>
+                </a:stretch>
+              </p:blipFill>
+              <p:spPr>
+                <a:xfrm>
+                  <a:off x="3790473" y="1677676"/>
+                  <a:ext cx="3086818" cy="2097967"/>
+                </a:xfrm>
+                <a:prstGeom prst="rect">
+                  <a:avLst/>
+                </a:prstGeom>
+              </p:spPr>
+            </p:pic>
+            <p:pic>
+              <p:nvPicPr>
+                <p:cNvPr id="14" name="Picture 13">
+                  <a:extLst>
+                    <a:ext uri="{FF2B5EF4-FFF2-40B4-BE49-F238E27FC236}">
+                      <a16:creationId xmlns:a16="http://schemas.microsoft.com/office/drawing/2014/main" id="{F8B2CC94-F808-650F-648B-BA01BA869723}"/>
+                    </a:ext>
+                  </a:extLst>
+                </p:cNvPr>
+                <p:cNvPicPr>
+                  <a:picLocks noChangeAspect="1"/>
+                </p:cNvPicPr>
+                <p:nvPr/>
+              </p:nvPicPr>
+              <p:blipFill>
+                <a:blip r:embed="rId5"/>
+                <a:stretch>
+                  <a:fillRect/>
+                </a:stretch>
+              </p:blipFill>
+              <p:spPr>
+                <a:xfrm>
+                  <a:off x="3790473" y="4220045"/>
+                  <a:ext cx="3086818" cy="579220"/>
+                </a:xfrm>
+                <a:prstGeom prst="rect">
+                  <a:avLst/>
+                </a:prstGeom>
+              </p:spPr>
+            </p:pic>
+            <p:pic>
+              <p:nvPicPr>
+                <p:cNvPr id="16" name="Picture 15">
+                  <a:extLst>
+                    <a:ext uri="{FF2B5EF4-FFF2-40B4-BE49-F238E27FC236}">
+                      <a16:creationId xmlns:a16="http://schemas.microsoft.com/office/drawing/2014/main" id="{763528C7-2369-E736-9530-CF29F4162EA9}"/>
+                    </a:ext>
+                  </a:extLst>
+                </p:cNvPr>
+                <p:cNvPicPr>
+                  <a:picLocks noChangeAspect="1"/>
+                </p:cNvPicPr>
+                <p:nvPr/>
+              </p:nvPicPr>
+              <p:blipFill>
+                <a:blip r:embed="rId6"/>
+                <a:stretch>
+                  <a:fillRect/>
+                </a:stretch>
+              </p:blipFill>
+              <p:spPr>
+                <a:xfrm>
+                  <a:off x="3790473" y="5243668"/>
+                  <a:ext cx="3086818" cy="1614332"/>
+                </a:xfrm>
+                <a:prstGeom prst="rect">
+                  <a:avLst/>
+                </a:prstGeom>
+              </p:spPr>
+            </p:pic>
+            <p:sp>
+              <p:nvSpPr>
+                <p:cNvPr id="17" name="Arrow: Down 16">
+                  <a:extLst>
+                    <a:ext uri="{FF2B5EF4-FFF2-40B4-BE49-F238E27FC236}">
+                      <a16:creationId xmlns:a16="http://schemas.microsoft.com/office/drawing/2014/main" id="{91BC0E6F-100B-B982-2474-1E5F0C6A1A1A}"/>
+                    </a:ext>
+                  </a:extLst>
+                </p:cNvPr>
+                <p:cNvSpPr/>
+                <p:nvPr/>
+              </p:nvSpPr>
+              <p:spPr>
+                <a:xfrm>
+                  <a:off x="5184742" y="1311458"/>
+                  <a:ext cx="329938" cy="310789"/>
+                </a:xfrm>
+                <a:prstGeom prst="downArrow">
+                  <a:avLst/>
+                </a:prstGeom>
+              </p:spPr>
+              <p:style>
+                <a:lnRef idx="2">
+                  <a:schemeClr val="dk1">
+                    <a:shade val="15000"/>
+                  </a:schemeClr>
+                </a:lnRef>
+                <a:fillRef idx="1">
+                  <a:schemeClr val="dk1"/>
+                </a:fillRef>
+                <a:effectRef idx="0">
+                  <a:schemeClr val="dk1"/>
+                </a:effectRef>
+                <a:fontRef idx="minor">
+                  <a:schemeClr val="lt1"/>
+                </a:fontRef>
+              </p:style>
+              <p:txBody>
+                <a:bodyPr rtlCol="0" anchor="ctr"/>
+                <a:lstStyle/>
+                <a:p>
+                  <a:pPr algn="ctr"/>
+                  <a:endParaRPr lang="en-US"/>
+                </a:p>
+              </p:txBody>
+            </p:sp>
+            <p:sp>
+              <p:nvSpPr>
+                <p:cNvPr id="19" name="Arrow: Down 18">
+                  <a:extLst>
+                    <a:ext uri="{FF2B5EF4-FFF2-40B4-BE49-F238E27FC236}">
+                      <a16:creationId xmlns:a16="http://schemas.microsoft.com/office/drawing/2014/main" id="{A07D7D57-1D7E-EAE8-6D6D-6BCCA939F328}"/>
+                    </a:ext>
+                  </a:extLst>
+                </p:cNvPr>
+                <p:cNvSpPr/>
+                <p:nvPr/>
+              </p:nvSpPr>
+              <p:spPr>
+                <a:xfrm>
+                  <a:off x="5184742" y="4866072"/>
+                  <a:ext cx="329938" cy="310789"/>
+                </a:xfrm>
+                <a:prstGeom prst="downArrow">
+                  <a:avLst/>
+                </a:prstGeom>
+              </p:spPr>
+              <p:style>
+                <a:lnRef idx="2">
+                  <a:schemeClr val="dk1">
+                    <a:shade val="15000"/>
+                  </a:schemeClr>
+                </a:lnRef>
+                <a:fillRef idx="1">
+                  <a:schemeClr val="dk1"/>
+                </a:fillRef>
+                <a:effectRef idx="0">
+                  <a:schemeClr val="dk1"/>
+                </a:effectRef>
+                <a:fontRef idx="minor">
+                  <a:schemeClr val="lt1"/>
+                </a:fontRef>
+              </p:style>
+              <p:txBody>
+                <a:bodyPr rtlCol="0" anchor="ctr"/>
+                <a:lstStyle/>
+                <a:p>
+                  <a:pPr algn="ctr"/>
+                  <a:endParaRPr lang="en-US"/>
+                </a:p>
+              </p:txBody>
+            </p:sp>
+          </p:grpSp>
+          <mc:AlternateContent xmlns:mc="http://schemas.openxmlformats.org/markup-compatibility/2006">
+            <mc:Choice xmlns:p14="http://schemas.microsoft.com/office/powerpoint/2010/main" Requires="p14">
+              <p:contentPart p14:bwMode="auto" r:id="rId7">
+                <p14:nvContentPartPr>
+                  <p14:cNvPr id="22" name="Ink 21">
+                    <a:extLst>
+                      <a:ext uri="{FF2B5EF4-FFF2-40B4-BE49-F238E27FC236}">
+                        <a16:creationId xmlns:a16="http://schemas.microsoft.com/office/drawing/2014/main" id="{EE076A79-45DF-9A4A-CFE9-C89838120718}"/>
+                      </a:ext>
+                    </a:extLst>
+                  </p14:cNvPr>
+                  <p14:cNvContentPartPr/>
+                  <p14:nvPr/>
+                </p14:nvContentPartPr>
+                <p14:xfrm>
+                  <a:off x="4312848" y="5307651"/>
+                  <a:ext cx="231120" cy="231120"/>
+                </p14:xfrm>
+              </p:contentPart>
+            </mc:Choice>
+            <mc:Fallback>
+              <p:pic>
+                <p:nvPicPr>
+                  <p:cNvPr id="22" name="Ink 21">
+                    <a:extLst>
+                      <a:ext uri="{FF2B5EF4-FFF2-40B4-BE49-F238E27FC236}">
+                        <a16:creationId xmlns:a16="http://schemas.microsoft.com/office/drawing/2014/main" id="{EE076A79-45DF-9A4A-CFE9-C89838120718}"/>
+                      </a:ext>
+                    </a:extLst>
+                  </p:cNvPr>
+                  <p:cNvPicPr/>
+                  <p:nvPr/>
+                </p:nvPicPr>
+                <p:blipFill>
+                  <a:blip r:embed="rId8"/>
+                  <a:stretch>
+                    <a:fillRect/>
+                  </a:stretch>
+                </p:blipFill>
+                <p:spPr>
+                  <a:xfrm>
+                    <a:off x="4306728" y="5301531"/>
+                    <a:ext cx="243360" cy="243360"/>
+                  </a:xfrm>
+                  <a:prstGeom prst="rect">
+                    <a:avLst/>
+                  </a:prstGeom>
+                </p:spPr>
+              </p:pic>
+            </mc:Fallback>
+          </mc:AlternateContent>
+        </p:grpSp>
+      </p:grpSp>
     </p:spTree>
     <p:extLst>
       <p:ext uri="{BB962C8B-B14F-4D97-AF65-F5344CB8AC3E}">
@@ -3435,7 +3981,7 @@
         <p:spPr>
           <a:xfrm>
             <a:off x="217714" y="255046"/>
-            <a:ext cx="11756571" cy="355354"/>
+            <a:ext cx="11756571" cy="6356997"/>
           </a:xfrm>
           <a:prstGeom prst="rect">
             <a:avLst/>
@@ -3454,6 +4000,511 @@
               </a:lnSpc>
               <a:buNone/>
             </a:pPr>
+            <a:r>
+              <a:rPr kumimoji="0" lang="en-US" altLang="en-US" sz="1300" b="1" i="0" u="none" strike="noStrike" cap="none" normalizeH="0" baseline="0">
+                <a:ln>
+                  <a:noFill/>
+                </a:ln>
+                <a:solidFill>
+                  <a:schemeClr val="tx1"/>
+                </a:solidFill>
+                <a:effectLst/>
+                <a:latin typeface="Arial" panose="020B0604020202020204" pitchFamily="34" charset="0"/>
+              </a:rPr>
+              <a:t>İstifadə məqsədi</a:t>
+            </a:r>
+            <a:r>
+              <a:rPr kumimoji="0" lang="en-US" altLang="en-US" sz="1300" b="0" i="0" u="none" strike="noStrike" cap="none" normalizeH="0" baseline="0">
+                <a:ln>
+                  <a:noFill/>
+                </a:ln>
+                <a:solidFill>
+                  <a:schemeClr val="tx1"/>
+                </a:solidFill>
+                <a:effectLst/>
+                <a:latin typeface="Arial" panose="020B0604020202020204" pitchFamily="34" charset="0"/>
+              </a:rPr>
+              <a:t>:</a:t>
+            </a:r>
+          </a:p>
+          <a:p>
+            <a:pPr>
+              <a:lnSpc>
+                <a:spcPct val="150000"/>
+              </a:lnSpc>
+              <a:buNone/>
+            </a:pPr>
+            <a:endParaRPr kumimoji="0" lang="en-US" altLang="en-US" sz="1300" b="0" i="0" u="none" strike="noStrike" cap="none" normalizeH="0" baseline="0">
+              <a:ln>
+                <a:noFill/>
+              </a:ln>
+              <a:solidFill>
+                <a:schemeClr val="tx1"/>
+              </a:solidFill>
+              <a:effectLst/>
+              <a:latin typeface="Arial" panose="020B0604020202020204" pitchFamily="34" charset="0"/>
+            </a:endParaRPr>
+          </a:p>
+          <a:p>
+            <a:pPr marL="742950" lvl="1" indent="-285750">
+              <a:lnSpc>
+                <a:spcPct val="150000"/>
+              </a:lnSpc>
+              <a:buFont typeface="Arial" panose="020B0604020202020204" pitchFamily="34" charset="0"/>
+              <a:buChar char="•"/>
+            </a:pPr>
+            <a:r>
+              <a:rPr kumimoji="0" lang="en-US" altLang="en-US" sz="1300" b="0" i="0" u="none" strike="noStrike" cap="none" normalizeH="0" baseline="0">
+                <a:ln>
+                  <a:noFill/>
+                </a:ln>
+                <a:solidFill>
+                  <a:schemeClr val="tx1"/>
+                </a:solidFill>
+                <a:effectLst/>
+                <a:latin typeface="Arial" panose="020B0604020202020204" pitchFamily="34" charset="0"/>
+              </a:rPr>
+              <a:t>Form göndərildikdən sonra status mesajları göstərmək.</a:t>
+            </a:r>
+          </a:p>
+          <a:p>
+            <a:pPr marL="742950" lvl="1" indent="-285750">
+              <a:lnSpc>
+                <a:spcPct val="150000"/>
+              </a:lnSpc>
+              <a:buFont typeface="Arial" panose="020B0604020202020204" pitchFamily="34" charset="0"/>
+              <a:buChar char="•"/>
+            </a:pPr>
+            <a:endParaRPr kumimoji="0" lang="en-US" altLang="en-US" sz="1300" b="0" i="0" u="none" strike="noStrike" cap="none" normalizeH="0" baseline="0">
+              <a:ln>
+                <a:noFill/>
+              </a:ln>
+              <a:solidFill>
+                <a:schemeClr val="tx1"/>
+              </a:solidFill>
+              <a:effectLst/>
+              <a:latin typeface="Arial" panose="020B0604020202020204" pitchFamily="34" charset="0"/>
+            </a:endParaRPr>
+          </a:p>
+          <a:p>
+            <a:pPr marL="742950" lvl="1" indent="-285750">
+              <a:lnSpc>
+                <a:spcPct val="150000"/>
+              </a:lnSpc>
+              <a:buFont typeface="Arial" panose="020B0604020202020204" pitchFamily="34" charset="0"/>
+              <a:buChar char="•"/>
+            </a:pPr>
+            <a:r>
+              <a:rPr kumimoji="0" lang="en-US" altLang="en-US" sz="1300" b="0" i="0" u="none" strike="noStrike" cap="none" normalizeH="0" baseline="0">
+                <a:ln>
+                  <a:noFill/>
+                </a:ln>
+                <a:solidFill>
+                  <a:schemeClr val="tx1"/>
+                </a:solidFill>
+                <a:effectLst/>
+                <a:latin typeface="Arial" panose="020B0604020202020204" pitchFamily="34" charset="0"/>
+              </a:rPr>
+              <a:t>Müvəqqəti bildirişlər (success, error).</a:t>
+            </a:r>
+          </a:p>
+          <a:p>
+            <a:pPr marL="742950" lvl="1" indent="-285750">
+              <a:lnSpc>
+                <a:spcPct val="150000"/>
+              </a:lnSpc>
+              <a:buFont typeface="Arial" panose="020B0604020202020204" pitchFamily="34" charset="0"/>
+              <a:buChar char="•"/>
+            </a:pPr>
+            <a:endParaRPr kumimoji="0" lang="en-US" altLang="en-US" sz="1300" b="0" i="0" u="none" strike="noStrike" cap="none" normalizeH="0" baseline="0">
+              <a:ln>
+                <a:noFill/>
+              </a:ln>
+              <a:solidFill>
+                <a:schemeClr val="tx1"/>
+              </a:solidFill>
+              <a:effectLst/>
+              <a:latin typeface="Arial" panose="020B0604020202020204" pitchFamily="34" charset="0"/>
+            </a:endParaRPr>
+          </a:p>
+          <a:p>
+            <a:pPr marL="742950" lvl="1" indent="-285750">
+              <a:lnSpc>
+                <a:spcPct val="150000"/>
+              </a:lnSpc>
+              <a:buFont typeface="Arial" panose="020B0604020202020204" pitchFamily="34" charset="0"/>
+              <a:buChar char="•"/>
+            </a:pPr>
+            <a:r>
+              <a:rPr kumimoji="0" lang="en-US" altLang="en-US" sz="1300" b="0" i="0" u="none" strike="noStrike" cap="none" normalizeH="0" baseline="0">
+                <a:ln>
+                  <a:noFill/>
+                </a:ln>
+                <a:solidFill>
+                  <a:schemeClr val="tx1"/>
+                </a:solidFill>
+                <a:effectLst/>
+                <a:latin typeface="Arial" panose="020B0604020202020204" pitchFamily="34" charset="0"/>
+              </a:rPr>
+              <a:t>Yenidən yönləndirmə zamanı bir dəfəlik məlumat ötürmək.</a:t>
+            </a:r>
+          </a:p>
+          <a:p>
+            <a:pPr>
+              <a:lnSpc>
+                <a:spcPct val="150000"/>
+              </a:lnSpc>
+              <a:buNone/>
+            </a:pPr>
+            <a:endParaRPr lang="en-US" altLang="en-US" sz="1300">
+              <a:latin typeface="Arial" panose="020B0604020202020204" pitchFamily="34" charset="0"/>
+            </a:endParaRPr>
+          </a:p>
+          <a:p>
+            <a:pPr>
+              <a:lnSpc>
+                <a:spcPct val="150000"/>
+              </a:lnSpc>
+              <a:buNone/>
+            </a:pPr>
+            <a:endParaRPr kumimoji="0" lang="en-US" altLang="en-US" sz="1300" b="0" i="0" u="none" strike="noStrike" cap="none" normalizeH="0" baseline="0">
+              <a:ln>
+                <a:noFill/>
+              </a:ln>
+              <a:solidFill>
+                <a:schemeClr val="tx1"/>
+              </a:solidFill>
+              <a:effectLst/>
+              <a:latin typeface="Arial" panose="020B0604020202020204" pitchFamily="34" charset="0"/>
+            </a:endParaRPr>
+          </a:p>
+          <a:p>
+            <a:pPr>
+              <a:lnSpc>
+                <a:spcPct val="150000"/>
+              </a:lnSpc>
+              <a:buNone/>
+            </a:pPr>
+            <a:endParaRPr lang="en-US" altLang="en-US" sz="1300">
+              <a:latin typeface="Arial" panose="020B0604020202020204" pitchFamily="34" charset="0"/>
+            </a:endParaRPr>
+          </a:p>
+          <a:p>
+            <a:pPr>
+              <a:lnSpc>
+                <a:spcPct val="150000"/>
+              </a:lnSpc>
+              <a:buNone/>
+            </a:pPr>
+            <a:endParaRPr kumimoji="0" lang="en-US" altLang="en-US" sz="1300" b="0" i="0" u="none" strike="noStrike" cap="none" normalizeH="0" baseline="0">
+              <a:ln>
+                <a:noFill/>
+              </a:ln>
+              <a:solidFill>
+                <a:schemeClr val="tx1"/>
+              </a:solidFill>
+              <a:effectLst/>
+              <a:latin typeface="Arial" panose="020B0604020202020204" pitchFamily="34" charset="0"/>
+            </a:endParaRPr>
+          </a:p>
+          <a:p>
+            <a:pPr>
+              <a:lnSpc>
+                <a:spcPct val="150000"/>
+              </a:lnSpc>
+              <a:buNone/>
+            </a:pPr>
+            <a:endParaRPr lang="en-US" altLang="en-US" sz="1300">
+              <a:latin typeface="Arial" panose="020B0604020202020204" pitchFamily="34" charset="0"/>
+            </a:endParaRPr>
+          </a:p>
+          <a:p>
+            <a:pPr>
+              <a:lnSpc>
+                <a:spcPct val="150000"/>
+              </a:lnSpc>
+              <a:buNone/>
+            </a:pPr>
+            <a:endParaRPr kumimoji="0" lang="en-US" altLang="en-US" sz="1300" b="0" i="0" u="none" strike="noStrike" cap="none" normalizeH="0" baseline="0">
+              <a:ln>
+                <a:noFill/>
+              </a:ln>
+              <a:solidFill>
+                <a:schemeClr val="tx1"/>
+              </a:solidFill>
+              <a:effectLst/>
+              <a:latin typeface="Arial" panose="020B0604020202020204" pitchFamily="34" charset="0"/>
+            </a:endParaRPr>
+          </a:p>
+          <a:p>
+            <a:pPr>
+              <a:lnSpc>
+                <a:spcPct val="150000"/>
+              </a:lnSpc>
+              <a:buNone/>
+            </a:pPr>
+            <a:r>
+              <a:rPr kumimoji="0" lang="en-US" altLang="en-US" sz="1300" b="1" i="0" u="none" strike="noStrike" cap="none" normalizeH="0" baseline="0">
+                <a:ln>
+                  <a:noFill/>
+                </a:ln>
+                <a:solidFill>
+                  <a:schemeClr val="tx1"/>
+                </a:solidFill>
+                <a:effectLst/>
+                <a:latin typeface="Arial" panose="020B0604020202020204" pitchFamily="34" charset="0"/>
+              </a:rPr>
+              <a:t>Bu kod nə edir?</a:t>
+            </a:r>
+          </a:p>
+          <a:p>
+            <a:pPr marL="742950" lvl="1" indent="-285750">
+              <a:lnSpc>
+                <a:spcPct val="150000"/>
+              </a:lnSpc>
+              <a:buFont typeface="Arial" panose="020B0604020202020204" pitchFamily="34" charset="0"/>
+              <a:buChar char="•"/>
+            </a:pPr>
+            <a:r>
+              <a:rPr kumimoji="0" lang="en-US" altLang="en-US" sz="1300" b="0" i="0" u="none" strike="noStrike" cap="none" normalizeH="0" baseline="0">
+                <a:ln>
+                  <a:noFill/>
+                </a:ln>
+                <a:solidFill>
+                  <a:schemeClr val="tx1"/>
+                </a:solidFill>
+                <a:effectLst/>
+                <a:latin typeface="Arial" panose="020B0604020202020204" pitchFamily="34" charset="0"/>
+              </a:rPr>
+              <a:t>Sessiyaya </a:t>
+            </a:r>
+            <a:r>
+              <a:rPr kumimoji="0" lang="en-US" altLang="en-US" sz="1300" b="1" i="0" u="none" strike="noStrike" cap="none" normalizeH="0" baseline="0">
+                <a:ln>
+                  <a:noFill/>
+                </a:ln>
+                <a:solidFill>
+                  <a:schemeClr val="tx1"/>
+                </a:solidFill>
+                <a:effectLst/>
+                <a:latin typeface="Arial" panose="020B0604020202020204" pitchFamily="34" charset="0"/>
+              </a:rPr>
+              <a:t>status =&gt; true </a:t>
+            </a:r>
+            <a:r>
+              <a:rPr kumimoji="0" lang="en-US" altLang="en-US" sz="1300" b="0" i="0" u="none" strike="noStrike" cap="none" normalizeH="0" baseline="0">
+                <a:ln>
+                  <a:noFill/>
+                </a:ln>
+                <a:solidFill>
+                  <a:schemeClr val="tx1"/>
+                </a:solidFill>
+                <a:effectLst/>
+                <a:latin typeface="Arial" panose="020B0604020202020204" pitchFamily="34" charset="0"/>
+              </a:rPr>
+              <a:t>adlı </a:t>
+            </a:r>
+            <a:r>
+              <a:rPr kumimoji="0" lang="en-US" altLang="en-US" sz="1300" b="0" i="0" u="none" strike="noStrike" cap="none" normalizeH="0" baseline="0">
+                <a:ln>
+                  <a:noFill/>
+                </a:ln>
+                <a:solidFill>
+                  <a:schemeClr val="accent2"/>
+                </a:solidFill>
+                <a:effectLst/>
+                <a:latin typeface="Arial" panose="020B0604020202020204" pitchFamily="34" charset="0"/>
+              </a:rPr>
+              <a:t>flash data </a:t>
+            </a:r>
+            <a:r>
+              <a:rPr kumimoji="0" lang="en-US" altLang="en-US" sz="1300" b="0" i="0" u="none" strike="noStrike" cap="none" normalizeH="0" baseline="0">
+                <a:ln>
+                  <a:noFill/>
+                </a:ln>
+                <a:solidFill>
+                  <a:schemeClr val="tx1"/>
+                </a:solidFill>
+                <a:effectLst/>
+                <a:latin typeface="Arial" panose="020B0604020202020204" pitchFamily="34" charset="0"/>
+              </a:rPr>
+              <a:t>əlavə edir.</a:t>
+            </a:r>
+          </a:p>
+          <a:p>
+            <a:pPr marL="742950" lvl="1" indent="-285750">
+              <a:lnSpc>
+                <a:spcPct val="150000"/>
+              </a:lnSpc>
+              <a:buFont typeface="Arial" panose="020B0604020202020204" pitchFamily="34" charset="0"/>
+              <a:buChar char="•"/>
+            </a:pPr>
+            <a:endParaRPr kumimoji="0" lang="en-US" altLang="en-US" sz="1300" b="0" i="0" u="none" strike="noStrike" cap="none" normalizeH="0" baseline="0">
+              <a:ln>
+                <a:noFill/>
+              </a:ln>
+              <a:solidFill>
+                <a:schemeClr val="tx1"/>
+              </a:solidFill>
+              <a:effectLst/>
+              <a:latin typeface="Arial" panose="020B0604020202020204" pitchFamily="34" charset="0"/>
+            </a:endParaRPr>
+          </a:p>
+          <a:p>
+            <a:pPr marL="742950" lvl="1" indent="-285750">
+              <a:lnSpc>
+                <a:spcPct val="150000"/>
+              </a:lnSpc>
+              <a:buFont typeface="Arial" panose="020B0604020202020204" pitchFamily="34" charset="0"/>
+              <a:buChar char="•"/>
+            </a:pPr>
+            <a:r>
+              <a:rPr kumimoji="0" lang="en-US" altLang="en-US" sz="1300" b="0" i="0" u="none" strike="noStrike" cap="none" normalizeH="0" baseline="0">
+                <a:ln>
+                  <a:noFill/>
+                </a:ln>
+                <a:solidFill>
+                  <a:schemeClr val="tx1"/>
+                </a:solidFill>
+                <a:effectLst/>
+                <a:latin typeface="Arial" panose="020B0604020202020204" pitchFamily="34" charset="0"/>
+              </a:rPr>
+              <a:t>İstifadəçini </a:t>
+            </a:r>
+            <a:r>
+              <a:rPr kumimoji="0" lang="en-US" altLang="en-US" sz="1300" b="1" i="0" u="none" strike="noStrike" cap="none" normalizeH="0" baseline="0">
+                <a:ln>
+                  <a:noFill/>
+                </a:ln>
+                <a:solidFill>
+                  <a:schemeClr val="tx1"/>
+                </a:solidFill>
+                <a:effectLst/>
+                <a:latin typeface="Arial" panose="020B0604020202020204" pitchFamily="34" charset="0"/>
+              </a:rPr>
+              <a:t>get-session route</a:t>
+            </a:r>
+            <a:r>
+              <a:rPr kumimoji="0" lang="en-US" altLang="en-US" sz="1300" b="0" i="0" u="none" strike="noStrike" cap="none" normalizeH="0" baseline="0">
+                <a:ln>
+                  <a:noFill/>
+                </a:ln>
+                <a:solidFill>
+                  <a:schemeClr val="tx1"/>
+                </a:solidFill>
+                <a:effectLst/>
+                <a:latin typeface="Arial" panose="020B0604020202020204" pitchFamily="34" charset="0"/>
+              </a:rPr>
+              <a:t>-una yönləndirir.</a:t>
+            </a:r>
+          </a:p>
+          <a:p>
+            <a:pPr marL="742950" lvl="1" indent="-285750">
+              <a:lnSpc>
+                <a:spcPct val="150000"/>
+              </a:lnSpc>
+              <a:buFont typeface="Arial" panose="020B0604020202020204" pitchFamily="34" charset="0"/>
+              <a:buChar char="•"/>
+            </a:pPr>
+            <a:endParaRPr kumimoji="0" lang="en-US" altLang="en-US" sz="1300" b="0" i="0" u="none" strike="noStrike" cap="none" normalizeH="0" baseline="0">
+              <a:ln>
+                <a:noFill/>
+              </a:ln>
+              <a:solidFill>
+                <a:schemeClr val="tx1"/>
+              </a:solidFill>
+              <a:effectLst/>
+              <a:latin typeface="Arial" panose="020B0604020202020204" pitchFamily="34" charset="0"/>
+            </a:endParaRPr>
+          </a:p>
+          <a:p>
+            <a:pPr marL="742950" lvl="1" indent="-285750">
+              <a:lnSpc>
+                <a:spcPct val="150000"/>
+              </a:lnSpc>
+              <a:buFont typeface="Arial" panose="020B0604020202020204" pitchFamily="34" charset="0"/>
+              <a:buChar char="•"/>
+            </a:pPr>
+            <a:r>
+              <a:rPr kumimoji="0" lang="en-US" altLang="en-US" sz="1300" b="1" i="0" u="none" strike="noStrike" cap="none" normalizeH="0" baseline="0">
+                <a:ln>
+                  <a:noFill/>
+                </a:ln>
+                <a:solidFill>
+                  <a:schemeClr val="tx1"/>
+                </a:solidFill>
+                <a:effectLst/>
+                <a:latin typeface="Arial" panose="020B0604020202020204" pitchFamily="34" charset="0"/>
+              </a:rPr>
+              <a:t>get-session route </a:t>
+            </a:r>
+            <a:r>
+              <a:rPr kumimoji="0" lang="en-US" altLang="en-US" sz="1300" b="0" i="0" u="none" strike="noStrike" cap="none" normalizeH="0" baseline="0">
+                <a:ln>
+                  <a:noFill/>
+                </a:ln>
+                <a:solidFill>
+                  <a:schemeClr val="tx1"/>
+                </a:solidFill>
+                <a:effectLst/>
+                <a:latin typeface="Arial" panose="020B0604020202020204" pitchFamily="34" charset="0"/>
+              </a:rPr>
+              <a:t>daxil olduqda bu məlumat əlçatan olur.</a:t>
+            </a:r>
+          </a:p>
+          <a:p>
+            <a:pPr marL="742950" lvl="1" indent="-285750">
+              <a:lnSpc>
+                <a:spcPct val="150000"/>
+              </a:lnSpc>
+              <a:buFont typeface="Arial" panose="020B0604020202020204" pitchFamily="34" charset="0"/>
+              <a:buChar char="•"/>
+            </a:pPr>
+            <a:endParaRPr kumimoji="0" lang="en-US" altLang="en-US" sz="1300" b="0" i="0" u="none" strike="noStrike" cap="none" normalizeH="0" baseline="0">
+              <a:ln>
+                <a:noFill/>
+              </a:ln>
+              <a:solidFill>
+                <a:schemeClr val="tx1"/>
+              </a:solidFill>
+              <a:effectLst/>
+              <a:latin typeface="Arial" panose="020B0604020202020204" pitchFamily="34" charset="0"/>
+            </a:endParaRPr>
+          </a:p>
+          <a:p>
+            <a:pPr marL="742950" lvl="1" indent="-285750">
+              <a:lnSpc>
+                <a:spcPct val="150000"/>
+              </a:lnSpc>
+              <a:buFont typeface="Arial" panose="020B0604020202020204" pitchFamily="34" charset="0"/>
+              <a:buChar char="•"/>
+            </a:pPr>
+            <a:r>
+              <a:rPr kumimoji="0" lang="en-US" altLang="en-US" sz="1300" b="0" i="0" u="none" strike="noStrike" cap="none" normalizeH="0" baseline="0">
+                <a:ln>
+                  <a:noFill/>
+                </a:ln>
+                <a:solidFill>
+                  <a:schemeClr val="tx1"/>
+                </a:solidFill>
+                <a:effectLst/>
+                <a:latin typeface="Arial" panose="020B0604020202020204" pitchFamily="34" charset="0"/>
+              </a:rPr>
+              <a:t>Ondan sonra avtomatik olaraq </a:t>
+            </a:r>
+            <a:r>
+              <a:rPr kumimoji="0" lang="en-US" altLang="en-US" sz="1300" b="1" i="0" u="none" strike="noStrike" cap="none" normalizeH="0" baseline="0">
+                <a:ln>
+                  <a:noFill/>
+                </a:ln>
+                <a:solidFill>
+                  <a:schemeClr val="tx1"/>
+                </a:solidFill>
+                <a:effectLst/>
+                <a:latin typeface="Arial" panose="020B0604020202020204" pitchFamily="34" charset="0"/>
+              </a:rPr>
+              <a:t>silinir</a:t>
+            </a:r>
             <a:r>
               <a:rPr kumimoji="0" lang="en-US" altLang="en-US" sz="1300" b="0" i="0" u="none" strike="noStrike" cap="none" normalizeH="0" baseline="0">
                 <a:ln>
@@ -3470,6 +4521,36 @@
           </a:p>
         </p:txBody>
       </p:sp>
+      <p:pic>
+        <p:nvPicPr>
+          <p:cNvPr id="4" name="Picture 3">
+            <a:extLst>
+              <a:ext uri="{FF2B5EF4-FFF2-40B4-BE49-F238E27FC236}">
+                <a16:creationId xmlns:a16="http://schemas.microsoft.com/office/drawing/2014/main" id="{0A4F921D-B13E-E2D4-4034-380996699B46}"/>
+              </a:ext>
+            </a:extLst>
+          </p:cNvPr>
+          <p:cNvPicPr>
+            <a:picLocks noChangeAspect="1"/>
+          </p:cNvPicPr>
+          <p:nvPr/>
+        </p:nvPicPr>
+        <p:blipFill>
+          <a:blip r:embed="rId2"/>
+          <a:stretch>
+            <a:fillRect/>
+          </a:stretch>
+        </p:blipFill>
+        <p:spPr>
+          <a:xfrm>
+            <a:off x="0" y="2881236"/>
+            <a:ext cx="4572638" cy="1095528"/>
+          </a:xfrm>
+          <a:prstGeom prst="rect">
+            <a:avLst/>
+          </a:prstGeom>
+        </p:spPr>
+      </p:pic>
     </p:spTree>
     <p:extLst>
       <p:ext uri="{BB962C8B-B14F-4D97-AF65-F5344CB8AC3E}">
@@ -3551,15 +4632,1303 @@
                 <a:effectLst/>
                 <a:latin typeface="Arial" panose="020B0604020202020204" pitchFamily="34" charset="0"/>
               </a:rPr>
-              <a:t>.</a:t>
-            </a:r>
-          </a:p>
-        </p:txBody>
-      </p:sp>
+              <a:t>Müqayisə: </a:t>
+            </a:r>
+            <a:r>
+              <a:rPr kumimoji="0" lang="en-US" altLang="en-US" sz="1300" b="1" u="none" strike="noStrike" cap="none" normalizeH="0" baseline="0">
+                <a:ln>
+                  <a:noFill/>
+                </a:ln>
+                <a:solidFill>
+                  <a:schemeClr val="tx1"/>
+                </a:solidFill>
+                <a:effectLst/>
+                <a:latin typeface="Arial" panose="020B0604020202020204" pitchFamily="34" charset="0"/>
+              </a:rPr>
+              <a:t>put() </a:t>
+            </a:r>
+            <a:r>
+              <a:rPr kumimoji="0" lang="en-US" altLang="en-US" sz="1300" b="0" i="0" u="none" strike="noStrike" cap="none" normalizeH="0" baseline="0">
+                <a:ln>
+                  <a:noFill/>
+                </a:ln>
+                <a:solidFill>
+                  <a:schemeClr val="tx1"/>
+                </a:solidFill>
+                <a:effectLst/>
+                <a:latin typeface="Arial" panose="020B0604020202020204" pitchFamily="34" charset="0"/>
+              </a:rPr>
+              <a:t>vs </a:t>
+            </a:r>
+            <a:r>
+              <a:rPr kumimoji="0" lang="en-US" altLang="en-US" sz="1300" b="1" i="0" u="none" strike="noStrike" cap="none" normalizeH="0" baseline="0">
+                <a:ln>
+                  <a:noFill/>
+                </a:ln>
+                <a:solidFill>
+                  <a:schemeClr val="tx1"/>
+                </a:solidFill>
+                <a:effectLst/>
+                <a:latin typeface="Arial" panose="020B0604020202020204" pitchFamily="34" charset="0"/>
+              </a:rPr>
+              <a:t>flash()</a:t>
+            </a:r>
+          </a:p>
+        </p:txBody>
+      </p:sp>
+      <p:graphicFrame>
+        <p:nvGraphicFramePr>
+          <p:cNvPr id="2" name="Table 1">
+            <a:extLst>
+              <a:ext uri="{FF2B5EF4-FFF2-40B4-BE49-F238E27FC236}">
+                <a16:creationId xmlns:a16="http://schemas.microsoft.com/office/drawing/2014/main" id="{79EA4DE1-D75D-D59A-20CA-2F2027389802}"/>
+              </a:ext>
+            </a:extLst>
+          </p:cNvPr>
+          <p:cNvGraphicFramePr>
+            <a:graphicFrameLocks noGrp="1"/>
+          </p:cNvGraphicFramePr>
+          <p:nvPr>
+            <p:extLst>
+              <p:ext uri="{D42A27DB-BD31-4B8C-83A1-F6EECF244321}">
+                <p14:modId xmlns:p14="http://schemas.microsoft.com/office/powerpoint/2010/main" val="3959455423"/>
+              </p:ext>
+            </p:extLst>
+          </p:nvPr>
+        </p:nvGraphicFramePr>
+        <p:xfrm>
+          <a:off x="217714" y="845671"/>
+          <a:ext cx="11622353" cy="2218038"/>
+        </p:xfrm>
+        <a:graphic>
+          <a:graphicData uri="http://schemas.openxmlformats.org/drawingml/2006/table">
+            <a:tbl>
+              <a:tblPr/>
+              <a:tblGrid>
+                <a:gridCol w="1268531">
+                  <a:extLst>
+                    <a:ext uri="{9D8B030D-6E8A-4147-A177-3AD203B41FA5}">
+                      <a16:colId xmlns:a16="http://schemas.microsoft.com/office/drawing/2014/main" val="1364422659"/>
+                    </a:ext>
+                  </a:extLst>
+                </a:gridCol>
+                <a:gridCol w="5176911">
+                  <a:extLst>
+                    <a:ext uri="{9D8B030D-6E8A-4147-A177-3AD203B41FA5}">
+                      <a16:colId xmlns:a16="http://schemas.microsoft.com/office/drawing/2014/main" val="1248162672"/>
+                    </a:ext>
+                  </a:extLst>
+                </a:gridCol>
+                <a:gridCol w="5176911">
+                  <a:extLst>
+                    <a:ext uri="{9D8B030D-6E8A-4147-A177-3AD203B41FA5}">
+                      <a16:colId xmlns:a16="http://schemas.microsoft.com/office/drawing/2014/main" val="2572065627"/>
+                    </a:ext>
+                  </a:extLst>
+                </a:gridCol>
+              </a:tblGrid>
+              <a:tr h="739346">
+                <a:tc>
+                  <a:txBody>
+                    <a:bodyPr/>
+                    <a:lstStyle/>
+                    <a:p>
+                      <a:r>
+                        <a:rPr lang="en-US" b="1"/>
+                        <a:t>Metod</a:t>
+                      </a:r>
+                    </a:p>
+                  </a:txBody>
+                  <a:tcPr anchor="ctr">
+                    <a:lnL w="12700" cap="flat" cmpd="sng" algn="ctr">
+                      <a:solidFill>
+                        <a:schemeClr val="tx1"/>
+                      </a:solidFill>
+                      <a:prstDash val="solid"/>
+                      <a:round/>
+                      <a:headEnd type="none" w="med" len="med"/>
+                      <a:tailEnd type="none" w="med" len="med"/>
+                    </a:lnL>
+                    <a:lnR w="12700" cap="flat" cmpd="sng" algn="ctr">
+                      <a:solidFill>
+                        <a:schemeClr val="tx1"/>
+                      </a:solidFill>
+                      <a:prstDash val="solid"/>
+                      <a:round/>
+                      <a:headEnd type="none" w="med" len="med"/>
+                      <a:tailEnd type="none" w="med" len="med"/>
+                    </a:lnR>
+                    <a:lnT w="12700" cap="flat" cmpd="sng" algn="ctr">
+                      <a:solidFill>
+                        <a:schemeClr val="tx1"/>
+                      </a:solidFill>
+                      <a:prstDash val="solid"/>
+                      <a:round/>
+                      <a:headEnd type="none" w="med" len="med"/>
+                      <a:tailEnd type="none" w="med" len="med"/>
+                    </a:lnT>
+                    <a:lnB w="12700" cap="flat" cmpd="sng" algn="ctr">
+                      <a:solidFill>
+                        <a:schemeClr val="tx1"/>
+                      </a:solidFill>
+                      <a:prstDash val="solid"/>
+                      <a:round/>
+                      <a:headEnd type="none" w="med" len="med"/>
+                      <a:tailEnd type="none" w="med" len="med"/>
+                    </a:lnB>
+                    <a:solidFill>
+                      <a:schemeClr val="accent2"/>
+                    </a:solidFill>
+                  </a:tcPr>
+                </a:tc>
+                <a:tc>
+                  <a:txBody>
+                    <a:bodyPr/>
+                    <a:lstStyle/>
+                    <a:p>
+                      <a:r>
+                        <a:rPr lang="en-US" b="1"/>
+                        <a:t>Saxlanma Müddəti</a:t>
+                      </a:r>
+                    </a:p>
+                  </a:txBody>
+                  <a:tcPr anchor="ctr">
+                    <a:lnL w="12700" cap="flat" cmpd="sng" algn="ctr">
+                      <a:solidFill>
+                        <a:schemeClr val="tx1"/>
+                      </a:solidFill>
+                      <a:prstDash val="solid"/>
+                      <a:round/>
+                      <a:headEnd type="none" w="med" len="med"/>
+                      <a:tailEnd type="none" w="med" len="med"/>
+                    </a:lnL>
+                    <a:lnR w="12700" cap="flat" cmpd="sng" algn="ctr">
+                      <a:solidFill>
+                        <a:schemeClr val="tx1"/>
+                      </a:solidFill>
+                      <a:prstDash val="solid"/>
+                      <a:round/>
+                      <a:headEnd type="none" w="med" len="med"/>
+                      <a:tailEnd type="none" w="med" len="med"/>
+                    </a:lnR>
+                    <a:lnT w="12700" cap="flat" cmpd="sng" algn="ctr">
+                      <a:solidFill>
+                        <a:schemeClr val="tx1"/>
+                      </a:solidFill>
+                      <a:prstDash val="solid"/>
+                      <a:round/>
+                      <a:headEnd type="none" w="med" len="med"/>
+                      <a:tailEnd type="none" w="med" len="med"/>
+                    </a:lnT>
+                    <a:lnB w="12700" cap="flat" cmpd="sng" algn="ctr">
+                      <a:solidFill>
+                        <a:schemeClr val="tx1"/>
+                      </a:solidFill>
+                      <a:prstDash val="solid"/>
+                      <a:round/>
+                      <a:headEnd type="none" w="med" len="med"/>
+                      <a:tailEnd type="none" w="med" len="med"/>
+                    </a:lnB>
+                    <a:solidFill>
+                      <a:schemeClr val="accent2"/>
+                    </a:solidFill>
+                  </a:tcPr>
+                </a:tc>
+                <a:tc>
+                  <a:txBody>
+                    <a:bodyPr/>
+                    <a:lstStyle/>
+                    <a:p>
+                      <a:r>
+                        <a:rPr lang="en-US" b="1"/>
+                        <a:t>İstifadə</a:t>
+                      </a:r>
+                    </a:p>
+                  </a:txBody>
+                  <a:tcPr anchor="ctr">
+                    <a:lnL w="12700" cap="flat" cmpd="sng" algn="ctr">
+                      <a:solidFill>
+                        <a:schemeClr val="tx1"/>
+                      </a:solidFill>
+                      <a:prstDash val="solid"/>
+                      <a:round/>
+                      <a:headEnd type="none" w="med" len="med"/>
+                      <a:tailEnd type="none" w="med" len="med"/>
+                    </a:lnL>
+                    <a:lnR w="12700" cap="flat" cmpd="sng" algn="ctr">
+                      <a:solidFill>
+                        <a:schemeClr val="tx1"/>
+                      </a:solidFill>
+                      <a:prstDash val="solid"/>
+                      <a:round/>
+                      <a:headEnd type="none" w="med" len="med"/>
+                      <a:tailEnd type="none" w="med" len="med"/>
+                    </a:lnR>
+                    <a:lnT w="12700" cap="flat" cmpd="sng" algn="ctr">
+                      <a:solidFill>
+                        <a:schemeClr val="tx1"/>
+                      </a:solidFill>
+                      <a:prstDash val="solid"/>
+                      <a:round/>
+                      <a:headEnd type="none" w="med" len="med"/>
+                      <a:tailEnd type="none" w="med" len="med"/>
+                    </a:lnT>
+                    <a:lnB w="12700" cap="flat" cmpd="sng" algn="ctr">
+                      <a:solidFill>
+                        <a:schemeClr val="tx1"/>
+                      </a:solidFill>
+                      <a:prstDash val="solid"/>
+                      <a:round/>
+                      <a:headEnd type="none" w="med" len="med"/>
+                      <a:tailEnd type="none" w="med" len="med"/>
+                    </a:lnB>
+                    <a:solidFill>
+                      <a:schemeClr val="accent2"/>
+                    </a:solidFill>
+                  </a:tcPr>
+                </a:tc>
+                <a:extLst>
+                  <a:ext uri="{0D108BD9-81ED-4DB2-BD59-A6C34878D82A}">
+                    <a16:rowId xmlns:a16="http://schemas.microsoft.com/office/drawing/2014/main" val="166915648"/>
+                  </a:ext>
+                </a:extLst>
+              </a:tr>
+              <a:tr h="739346">
+                <a:tc>
+                  <a:txBody>
+                    <a:bodyPr/>
+                    <a:lstStyle/>
+                    <a:p>
+                      <a:r>
+                        <a:rPr lang="en-US"/>
+                        <a:t>put()</a:t>
+                      </a:r>
+                    </a:p>
+                  </a:txBody>
+                  <a:tcPr anchor="ctr">
+                    <a:lnL w="12700" cap="flat" cmpd="sng" algn="ctr">
+                      <a:solidFill>
+                        <a:schemeClr val="tx1"/>
+                      </a:solidFill>
+                      <a:prstDash val="solid"/>
+                      <a:round/>
+                      <a:headEnd type="none" w="med" len="med"/>
+                      <a:tailEnd type="none" w="med" len="med"/>
+                    </a:lnL>
+                    <a:lnR w="12700" cap="flat" cmpd="sng" algn="ctr">
+                      <a:solidFill>
+                        <a:schemeClr val="tx1"/>
+                      </a:solidFill>
+                      <a:prstDash val="solid"/>
+                      <a:round/>
+                      <a:headEnd type="none" w="med" len="med"/>
+                      <a:tailEnd type="none" w="med" len="med"/>
+                    </a:lnR>
+                    <a:lnT w="12700" cap="flat" cmpd="sng" algn="ctr">
+                      <a:solidFill>
+                        <a:schemeClr val="tx1"/>
+                      </a:solidFill>
+                      <a:prstDash val="solid"/>
+                      <a:round/>
+                      <a:headEnd type="none" w="med" len="med"/>
+                      <a:tailEnd type="none" w="med" len="med"/>
+                    </a:lnT>
+                    <a:lnB w="12700" cap="flat" cmpd="sng" algn="ctr">
+                      <a:solidFill>
+                        <a:schemeClr val="tx1"/>
+                      </a:solidFill>
+                      <a:prstDash val="solid"/>
+                      <a:round/>
+                      <a:headEnd type="none" w="med" len="med"/>
+                      <a:tailEnd type="none" w="med" len="med"/>
+                    </a:lnB>
+                    <a:noFill/>
+                  </a:tcPr>
+                </a:tc>
+                <a:tc>
+                  <a:txBody>
+                    <a:bodyPr/>
+                    <a:lstStyle/>
+                    <a:p>
+                      <a:r>
+                        <a:rPr lang="en-US"/>
+                        <a:t>Sessiya bitənədək (və ya silənədək)</a:t>
+                      </a:r>
+                    </a:p>
+                  </a:txBody>
+                  <a:tcPr anchor="ctr">
+                    <a:lnL w="12700" cap="flat" cmpd="sng" algn="ctr">
+                      <a:solidFill>
+                        <a:schemeClr val="tx1"/>
+                      </a:solidFill>
+                      <a:prstDash val="solid"/>
+                      <a:round/>
+                      <a:headEnd type="none" w="med" len="med"/>
+                      <a:tailEnd type="none" w="med" len="med"/>
+                    </a:lnL>
+                    <a:lnR w="12700" cap="flat" cmpd="sng" algn="ctr">
+                      <a:solidFill>
+                        <a:schemeClr val="tx1"/>
+                      </a:solidFill>
+                      <a:prstDash val="solid"/>
+                      <a:round/>
+                      <a:headEnd type="none" w="med" len="med"/>
+                      <a:tailEnd type="none" w="med" len="med"/>
+                    </a:lnR>
+                    <a:lnT w="12700" cap="flat" cmpd="sng" algn="ctr">
+                      <a:solidFill>
+                        <a:schemeClr val="tx1"/>
+                      </a:solidFill>
+                      <a:prstDash val="solid"/>
+                      <a:round/>
+                      <a:headEnd type="none" w="med" len="med"/>
+                      <a:tailEnd type="none" w="med" len="med"/>
+                    </a:lnT>
+                    <a:lnB w="12700" cap="flat" cmpd="sng" algn="ctr">
+                      <a:solidFill>
+                        <a:schemeClr val="tx1"/>
+                      </a:solidFill>
+                      <a:prstDash val="solid"/>
+                      <a:round/>
+                      <a:headEnd type="none" w="med" len="med"/>
+                      <a:tailEnd type="none" w="med" len="med"/>
+                    </a:lnB>
+                    <a:noFill/>
+                  </a:tcPr>
+                </a:tc>
+                <a:tc>
+                  <a:txBody>
+                    <a:bodyPr/>
+                    <a:lstStyle/>
+                    <a:p>
+                      <a:r>
+                        <a:rPr lang="en-US"/>
+                        <a:t>Uzunmüddətli sessiya datası</a:t>
+                      </a:r>
+                    </a:p>
+                  </a:txBody>
+                  <a:tcPr anchor="ctr">
+                    <a:lnL w="12700" cap="flat" cmpd="sng" algn="ctr">
+                      <a:solidFill>
+                        <a:schemeClr val="tx1"/>
+                      </a:solidFill>
+                      <a:prstDash val="solid"/>
+                      <a:round/>
+                      <a:headEnd type="none" w="med" len="med"/>
+                      <a:tailEnd type="none" w="med" len="med"/>
+                    </a:lnL>
+                    <a:lnR w="12700" cap="flat" cmpd="sng" algn="ctr">
+                      <a:solidFill>
+                        <a:schemeClr val="tx1"/>
+                      </a:solidFill>
+                      <a:prstDash val="solid"/>
+                      <a:round/>
+                      <a:headEnd type="none" w="med" len="med"/>
+                      <a:tailEnd type="none" w="med" len="med"/>
+                    </a:lnR>
+                    <a:lnT w="12700" cap="flat" cmpd="sng" algn="ctr">
+                      <a:solidFill>
+                        <a:schemeClr val="tx1"/>
+                      </a:solidFill>
+                      <a:prstDash val="solid"/>
+                      <a:round/>
+                      <a:headEnd type="none" w="med" len="med"/>
+                      <a:tailEnd type="none" w="med" len="med"/>
+                    </a:lnT>
+                    <a:lnB w="12700" cap="flat" cmpd="sng" algn="ctr">
+                      <a:solidFill>
+                        <a:schemeClr val="tx1"/>
+                      </a:solidFill>
+                      <a:prstDash val="solid"/>
+                      <a:round/>
+                      <a:headEnd type="none" w="med" len="med"/>
+                      <a:tailEnd type="none" w="med" len="med"/>
+                    </a:lnB>
+                    <a:noFill/>
+                  </a:tcPr>
+                </a:tc>
+                <a:extLst>
+                  <a:ext uri="{0D108BD9-81ED-4DB2-BD59-A6C34878D82A}">
+                    <a16:rowId xmlns:a16="http://schemas.microsoft.com/office/drawing/2014/main" val="470602816"/>
+                  </a:ext>
+                </a:extLst>
+              </a:tr>
+              <a:tr h="739346">
+                <a:tc>
+                  <a:txBody>
+                    <a:bodyPr/>
+                    <a:lstStyle/>
+                    <a:p>
+                      <a:r>
+                        <a:rPr lang="en-US"/>
+                        <a:t>flash()</a:t>
+                      </a:r>
+                    </a:p>
+                  </a:txBody>
+                  <a:tcPr anchor="ctr">
+                    <a:lnL w="12700" cap="flat" cmpd="sng" algn="ctr">
+                      <a:solidFill>
+                        <a:schemeClr val="tx1"/>
+                      </a:solidFill>
+                      <a:prstDash val="solid"/>
+                      <a:round/>
+                      <a:headEnd type="none" w="med" len="med"/>
+                      <a:tailEnd type="none" w="med" len="med"/>
+                    </a:lnL>
+                    <a:lnR w="12700" cap="flat" cmpd="sng" algn="ctr">
+                      <a:solidFill>
+                        <a:schemeClr val="tx1"/>
+                      </a:solidFill>
+                      <a:prstDash val="solid"/>
+                      <a:round/>
+                      <a:headEnd type="none" w="med" len="med"/>
+                      <a:tailEnd type="none" w="med" len="med"/>
+                    </a:lnR>
+                    <a:lnT w="12700" cap="flat" cmpd="sng" algn="ctr">
+                      <a:solidFill>
+                        <a:schemeClr val="tx1"/>
+                      </a:solidFill>
+                      <a:prstDash val="solid"/>
+                      <a:round/>
+                      <a:headEnd type="none" w="med" len="med"/>
+                      <a:tailEnd type="none" w="med" len="med"/>
+                    </a:lnT>
+                    <a:lnB w="12700" cap="flat" cmpd="sng" algn="ctr">
+                      <a:solidFill>
+                        <a:schemeClr val="tx1"/>
+                      </a:solidFill>
+                      <a:prstDash val="solid"/>
+                      <a:round/>
+                      <a:headEnd type="none" w="med" len="med"/>
+                      <a:tailEnd type="none" w="med" len="med"/>
+                    </a:lnB>
+                    <a:noFill/>
+                  </a:tcPr>
+                </a:tc>
+                <a:tc>
+                  <a:txBody>
+                    <a:bodyPr/>
+                    <a:lstStyle/>
+                    <a:p>
+                      <a:r>
+                        <a:rPr lang="en-US"/>
+                        <a:t>Yalnız </a:t>
+                      </a:r>
+                      <a:r>
+                        <a:rPr lang="en-US" b="1"/>
+                        <a:t>1 dəfəlik</a:t>
+                      </a:r>
+                      <a:r>
+                        <a:rPr lang="en-US"/>
+                        <a:t> – növbəti request üçün</a:t>
+                      </a:r>
+                    </a:p>
+                  </a:txBody>
+                  <a:tcPr anchor="ctr">
+                    <a:lnL w="12700" cap="flat" cmpd="sng" algn="ctr">
+                      <a:solidFill>
+                        <a:schemeClr val="tx1"/>
+                      </a:solidFill>
+                      <a:prstDash val="solid"/>
+                      <a:round/>
+                      <a:headEnd type="none" w="med" len="med"/>
+                      <a:tailEnd type="none" w="med" len="med"/>
+                    </a:lnL>
+                    <a:lnR w="12700" cap="flat" cmpd="sng" algn="ctr">
+                      <a:solidFill>
+                        <a:schemeClr val="tx1"/>
+                      </a:solidFill>
+                      <a:prstDash val="solid"/>
+                      <a:round/>
+                      <a:headEnd type="none" w="med" len="med"/>
+                      <a:tailEnd type="none" w="med" len="med"/>
+                    </a:lnR>
+                    <a:lnT w="12700" cap="flat" cmpd="sng" algn="ctr">
+                      <a:solidFill>
+                        <a:schemeClr val="tx1"/>
+                      </a:solidFill>
+                      <a:prstDash val="solid"/>
+                      <a:round/>
+                      <a:headEnd type="none" w="med" len="med"/>
+                      <a:tailEnd type="none" w="med" len="med"/>
+                    </a:lnT>
+                    <a:lnB w="12700" cap="flat" cmpd="sng" algn="ctr">
+                      <a:solidFill>
+                        <a:schemeClr val="tx1"/>
+                      </a:solidFill>
+                      <a:prstDash val="solid"/>
+                      <a:round/>
+                      <a:headEnd type="none" w="med" len="med"/>
+                      <a:tailEnd type="none" w="med" len="med"/>
+                    </a:lnB>
+                    <a:noFill/>
+                  </a:tcPr>
+                </a:tc>
+                <a:tc>
+                  <a:txBody>
+                    <a:bodyPr/>
+                    <a:lstStyle/>
+                    <a:p>
+                      <a:r>
+                        <a:rPr lang="en-US"/>
+                        <a:t>Bildirişlər, mesajlar, redirect sonrası göstərişlər</a:t>
+                      </a:r>
+                    </a:p>
+                  </a:txBody>
+                  <a:tcPr anchor="ctr">
+                    <a:lnL w="12700" cap="flat" cmpd="sng" algn="ctr">
+                      <a:solidFill>
+                        <a:schemeClr val="tx1"/>
+                      </a:solidFill>
+                      <a:prstDash val="solid"/>
+                      <a:round/>
+                      <a:headEnd type="none" w="med" len="med"/>
+                      <a:tailEnd type="none" w="med" len="med"/>
+                    </a:lnL>
+                    <a:lnR w="12700" cap="flat" cmpd="sng" algn="ctr">
+                      <a:solidFill>
+                        <a:schemeClr val="tx1"/>
+                      </a:solidFill>
+                      <a:prstDash val="solid"/>
+                      <a:round/>
+                      <a:headEnd type="none" w="med" len="med"/>
+                      <a:tailEnd type="none" w="med" len="med"/>
+                    </a:lnR>
+                    <a:lnT w="12700" cap="flat" cmpd="sng" algn="ctr">
+                      <a:solidFill>
+                        <a:schemeClr val="tx1"/>
+                      </a:solidFill>
+                      <a:prstDash val="solid"/>
+                      <a:round/>
+                      <a:headEnd type="none" w="med" len="med"/>
+                      <a:tailEnd type="none" w="med" len="med"/>
+                    </a:lnT>
+                    <a:lnB w="12700" cap="flat" cmpd="sng" algn="ctr">
+                      <a:solidFill>
+                        <a:schemeClr val="tx1"/>
+                      </a:solidFill>
+                      <a:prstDash val="solid"/>
+                      <a:round/>
+                      <a:headEnd type="none" w="med" len="med"/>
+                      <a:tailEnd type="none" w="med" len="med"/>
+                    </a:lnB>
+                    <a:noFill/>
+                  </a:tcPr>
+                </a:tc>
+                <a:extLst>
+                  <a:ext uri="{0D108BD9-81ED-4DB2-BD59-A6C34878D82A}">
+                    <a16:rowId xmlns:a16="http://schemas.microsoft.com/office/drawing/2014/main" val="1676337847"/>
+                  </a:ext>
+                </a:extLst>
+              </a:tr>
+            </a:tbl>
+          </a:graphicData>
+        </a:graphic>
+      </p:graphicFrame>
     </p:spTree>
     <p:extLst>
       <p:ext uri="{BB962C8B-B14F-4D97-AF65-F5344CB8AC3E}">
         <p14:creationId xmlns:p14="http://schemas.microsoft.com/office/powerpoint/2010/main" val="3095838342"/>
+      </p:ext>
+    </p:extLst>
+  </p:cSld>
+  <p:clrMapOvr>
+    <a:masterClrMapping/>
+  </p:clrMapOvr>
+</p:sld>
+</file>
+
+<file path=ppt/slides/slide4.xml><?xml version="1.0" encoding="utf-8"?>
+<p:sld xmlns:a="http://schemas.openxmlformats.org/drawingml/2006/main" xmlns:r="http://schemas.openxmlformats.org/officeDocument/2006/relationships" xmlns:p="http://schemas.openxmlformats.org/presentationml/2006/main">
+  <p:cSld>
+    <p:spTree>
+      <p:nvGrpSpPr>
+        <p:cNvPr id="1" name="">
+          <a:extLst>
+            <a:ext uri="{FF2B5EF4-FFF2-40B4-BE49-F238E27FC236}">
+              <a16:creationId xmlns:a16="http://schemas.microsoft.com/office/drawing/2014/main" id="{8453BB82-5A41-D9DE-F510-0FE32BB2E92E}"/>
+            </a:ext>
+          </a:extLst>
+        </p:cNvPr>
+        <p:cNvGrpSpPr/>
+        <p:nvPr/>
+      </p:nvGrpSpPr>
+      <p:grpSpPr>
+        <a:xfrm>
+          <a:off x="0" y="0"/>
+          <a:ext cx="0" cy="0"/>
+          <a:chOff x="0" y="0"/>
+          <a:chExt cx="0" cy="0"/>
+        </a:xfrm>
+      </p:grpSpPr>
+      <p:sp>
+        <p:nvSpPr>
+          <p:cNvPr id="3" name="TextBox 2">
+            <a:extLst>
+              <a:ext uri="{FF2B5EF4-FFF2-40B4-BE49-F238E27FC236}">
+                <a16:creationId xmlns:a16="http://schemas.microsoft.com/office/drawing/2014/main" id="{2556D3F2-2B3B-2386-F71E-865D31D4862D}"/>
+              </a:ext>
+            </a:extLst>
+          </p:cNvPr>
+          <p:cNvSpPr txBox="1"/>
+          <p:nvPr/>
+        </p:nvSpPr>
+        <p:spPr>
+          <a:xfrm>
+            <a:off x="217714" y="255046"/>
+            <a:ext cx="11756571" cy="6429132"/>
+          </a:xfrm>
+          <a:prstGeom prst="rect">
+            <a:avLst/>
+          </a:prstGeom>
+          <a:noFill/>
+        </p:spPr>
+        <p:txBody>
+          <a:bodyPr wrap="square">
+            <a:spAutoFit/>
+          </a:bodyPr>
+          <a:lstStyle/>
+          <a:p>
+            <a:pPr>
+              <a:lnSpc>
+                <a:spcPct val="150000"/>
+              </a:lnSpc>
+              <a:buNone/>
+            </a:pPr>
+            <a:r>
+              <a:rPr kumimoji="0" lang="en-US" altLang="en-US" sz="1400" b="0" i="0" u="none" strike="noStrike" cap="none" normalizeH="0" baseline="0">
+                <a:ln>
+                  <a:noFill/>
+                </a:ln>
+                <a:solidFill>
+                  <a:schemeClr val="tx1"/>
+                </a:solidFill>
+                <a:effectLst/>
+                <a:latin typeface="Arial" panose="020B0604020202020204" pitchFamily="34" charset="0"/>
+              </a:rPr>
+              <a:t>Real nümunə: Form göndərilməsi ( Bizd</a:t>
+            </a:r>
+            <a:r>
+              <a:rPr kumimoji="0" lang="az-Latn-AZ" altLang="en-US" sz="1400" b="0" i="0" u="none" strike="noStrike" cap="none" normalizeH="0" baseline="0">
+                <a:ln>
+                  <a:noFill/>
+                </a:ln>
+                <a:solidFill>
+                  <a:schemeClr val="tx1"/>
+                </a:solidFill>
+                <a:effectLst/>
+                <a:latin typeface="Arial" panose="020B0604020202020204" pitchFamily="34" charset="0"/>
+              </a:rPr>
+              <a:t>ə mövcud olan bir nümunə deyil. Sadəcə bir nümunədir. </a:t>
+            </a:r>
+            <a:r>
+              <a:rPr kumimoji="0" lang="en-US" altLang="en-US" sz="1400" b="0" i="0" u="none" strike="noStrike" cap="none" normalizeH="0" baseline="0">
+                <a:ln>
+                  <a:noFill/>
+                </a:ln>
+                <a:solidFill>
+                  <a:schemeClr val="tx1"/>
+                </a:solidFill>
+                <a:effectLst/>
+                <a:latin typeface="Arial" panose="020B0604020202020204" pitchFamily="34" charset="0"/>
+              </a:rPr>
+              <a:t>)</a:t>
+            </a:r>
+            <a:endParaRPr kumimoji="0" lang="az-Latn-AZ" altLang="en-US" sz="1400" b="0" i="0" u="none" strike="noStrike" cap="none" normalizeH="0" baseline="0">
+              <a:ln>
+                <a:noFill/>
+              </a:ln>
+              <a:solidFill>
+                <a:schemeClr val="tx1"/>
+              </a:solidFill>
+              <a:effectLst/>
+              <a:latin typeface="Arial" panose="020B0604020202020204" pitchFamily="34" charset="0"/>
+            </a:endParaRPr>
+          </a:p>
+          <a:p>
+            <a:pPr>
+              <a:lnSpc>
+                <a:spcPct val="150000"/>
+              </a:lnSpc>
+              <a:buNone/>
+            </a:pPr>
+            <a:endParaRPr lang="az-Latn-AZ" altLang="en-US" sz="1200">
+              <a:latin typeface="Arial" panose="020B0604020202020204" pitchFamily="34" charset="0"/>
+            </a:endParaRPr>
+          </a:p>
+          <a:p>
+            <a:pPr>
+              <a:lnSpc>
+                <a:spcPct val="150000"/>
+              </a:lnSpc>
+              <a:buNone/>
+            </a:pPr>
+            <a:endParaRPr kumimoji="0" lang="az-Latn-AZ" altLang="en-US" sz="1200" b="0" i="0" u="none" strike="noStrike" cap="none" normalizeH="0" baseline="0">
+              <a:ln>
+                <a:noFill/>
+              </a:ln>
+              <a:solidFill>
+                <a:schemeClr val="tx1"/>
+              </a:solidFill>
+              <a:effectLst/>
+              <a:latin typeface="Arial" panose="020B0604020202020204" pitchFamily="34" charset="0"/>
+            </a:endParaRPr>
+          </a:p>
+          <a:p>
+            <a:pPr>
+              <a:lnSpc>
+                <a:spcPct val="150000"/>
+              </a:lnSpc>
+              <a:buNone/>
+            </a:pPr>
+            <a:endParaRPr lang="az-Latn-AZ" altLang="en-US" sz="1200">
+              <a:latin typeface="Arial" panose="020B0604020202020204" pitchFamily="34" charset="0"/>
+            </a:endParaRPr>
+          </a:p>
+          <a:p>
+            <a:pPr>
+              <a:lnSpc>
+                <a:spcPct val="150000"/>
+              </a:lnSpc>
+              <a:buNone/>
+            </a:pPr>
+            <a:endParaRPr kumimoji="0" lang="az-Latn-AZ" altLang="en-US" sz="1200" b="0" i="0" u="none" strike="noStrike" cap="none" normalizeH="0" baseline="0">
+              <a:ln>
+                <a:noFill/>
+              </a:ln>
+              <a:solidFill>
+                <a:schemeClr val="tx1"/>
+              </a:solidFill>
+              <a:effectLst/>
+              <a:latin typeface="Arial" panose="020B0604020202020204" pitchFamily="34" charset="0"/>
+            </a:endParaRPr>
+          </a:p>
+          <a:p>
+            <a:pPr>
+              <a:lnSpc>
+                <a:spcPct val="150000"/>
+              </a:lnSpc>
+              <a:buNone/>
+            </a:pPr>
+            <a:endParaRPr lang="az-Latn-AZ" altLang="en-US" sz="1200">
+              <a:latin typeface="Arial" panose="020B0604020202020204" pitchFamily="34" charset="0"/>
+            </a:endParaRPr>
+          </a:p>
+          <a:p>
+            <a:pPr>
+              <a:lnSpc>
+                <a:spcPct val="150000"/>
+              </a:lnSpc>
+              <a:buNone/>
+            </a:pPr>
+            <a:endParaRPr kumimoji="0" lang="az-Latn-AZ" altLang="en-US" sz="1200" b="0" i="0" u="none" strike="noStrike" cap="none" normalizeH="0" baseline="0">
+              <a:ln>
+                <a:noFill/>
+              </a:ln>
+              <a:solidFill>
+                <a:schemeClr val="tx1"/>
+              </a:solidFill>
+              <a:effectLst/>
+              <a:latin typeface="Arial" panose="020B0604020202020204" pitchFamily="34" charset="0"/>
+            </a:endParaRPr>
+          </a:p>
+          <a:p>
+            <a:pPr>
+              <a:lnSpc>
+                <a:spcPct val="150000"/>
+              </a:lnSpc>
+              <a:buNone/>
+            </a:pPr>
+            <a:endParaRPr lang="az-Latn-AZ" altLang="en-US" sz="1200">
+              <a:latin typeface="Arial" panose="020B0604020202020204" pitchFamily="34" charset="0"/>
+            </a:endParaRPr>
+          </a:p>
+          <a:p>
+            <a:pPr>
+              <a:lnSpc>
+                <a:spcPct val="150000"/>
+              </a:lnSpc>
+              <a:buNone/>
+            </a:pPr>
+            <a:endParaRPr kumimoji="0" lang="az-Latn-AZ" altLang="en-US" sz="1200" b="0" i="0" u="none" strike="noStrike" cap="none" normalizeH="0" baseline="0">
+              <a:ln>
+                <a:noFill/>
+              </a:ln>
+              <a:solidFill>
+                <a:schemeClr val="tx1"/>
+              </a:solidFill>
+              <a:effectLst/>
+              <a:latin typeface="Arial" panose="020B0604020202020204" pitchFamily="34" charset="0"/>
+            </a:endParaRPr>
+          </a:p>
+          <a:p>
+            <a:pPr>
+              <a:lnSpc>
+                <a:spcPct val="150000"/>
+              </a:lnSpc>
+              <a:buNone/>
+            </a:pPr>
+            <a:endParaRPr lang="az-Latn-AZ" altLang="en-US" sz="1200">
+              <a:latin typeface="Arial" panose="020B0604020202020204" pitchFamily="34" charset="0"/>
+            </a:endParaRPr>
+          </a:p>
+          <a:p>
+            <a:pPr>
+              <a:lnSpc>
+                <a:spcPct val="150000"/>
+              </a:lnSpc>
+              <a:buNone/>
+            </a:pPr>
+            <a:endParaRPr kumimoji="0" lang="az-Latn-AZ" altLang="en-US" sz="1200" b="0" i="0" u="none" strike="noStrike" cap="none" normalizeH="0" baseline="0">
+              <a:ln>
+                <a:noFill/>
+              </a:ln>
+              <a:solidFill>
+                <a:schemeClr val="tx1"/>
+              </a:solidFill>
+              <a:effectLst/>
+              <a:latin typeface="Arial" panose="020B0604020202020204" pitchFamily="34" charset="0"/>
+            </a:endParaRPr>
+          </a:p>
+          <a:p>
+            <a:pPr>
+              <a:lnSpc>
+                <a:spcPct val="150000"/>
+              </a:lnSpc>
+              <a:buNone/>
+            </a:pPr>
+            <a:endParaRPr lang="az-Latn-AZ" altLang="en-US" sz="1200">
+              <a:latin typeface="Arial" panose="020B0604020202020204" pitchFamily="34" charset="0"/>
+            </a:endParaRPr>
+          </a:p>
+          <a:p>
+            <a:pPr>
+              <a:lnSpc>
+                <a:spcPct val="150000"/>
+              </a:lnSpc>
+              <a:buNone/>
+            </a:pPr>
+            <a:endParaRPr kumimoji="0" lang="az-Latn-AZ" altLang="en-US" sz="1200" b="0" i="0" u="none" strike="noStrike" cap="none" normalizeH="0" baseline="0">
+              <a:ln>
+                <a:noFill/>
+              </a:ln>
+              <a:solidFill>
+                <a:schemeClr val="tx1"/>
+              </a:solidFill>
+              <a:effectLst/>
+              <a:latin typeface="Arial" panose="020B0604020202020204" pitchFamily="34" charset="0"/>
+            </a:endParaRPr>
+          </a:p>
+          <a:p>
+            <a:pPr>
+              <a:lnSpc>
+                <a:spcPct val="150000"/>
+              </a:lnSpc>
+              <a:buNone/>
+            </a:pPr>
+            <a:endParaRPr lang="az-Latn-AZ" altLang="en-US" sz="1200">
+              <a:latin typeface="Arial" panose="020B0604020202020204" pitchFamily="34" charset="0"/>
+            </a:endParaRPr>
+          </a:p>
+          <a:p>
+            <a:pPr>
+              <a:lnSpc>
+                <a:spcPct val="150000"/>
+              </a:lnSpc>
+              <a:buNone/>
+            </a:pPr>
+            <a:endParaRPr kumimoji="0" lang="az-Latn-AZ" altLang="en-US" sz="1200" b="0" i="0" u="none" strike="noStrike" cap="none" normalizeH="0" baseline="0">
+              <a:ln>
+                <a:noFill/>
+              </a:ln>
+              <a:solidFill>
+                <a:schemeClr val="tx1"/>
+              </a:solidFill>
+              <a:effectLst/>
+              <a:latin typeface="Arial" panose="020B0604020202020204" pitchFamily="34" charset="0"/>
+            </a:endParaRPr>
+          </a:p>
+          <a:p>
+            <a:pPr>
+              <a:lnSpc>
+                <a:spcPct val="150000"/>
+              </a:lnSpc>
+              <a:buNone/>
+            </a:pPr>
+            <a:endParaRPr lang="az-Latn-AZ" altLang="en-US" sz="1200">
+              <a:latin typeface="Arial" panose="020B0604020202020204" pitchFamily="34" charset="0"/>
+            </a:endParaRPr>
+          </a:p>
+          <a:p>
+            <a:pPr>
+              <a:lnSpc>
+                <a:spcPct val="150000"/>
+              </a:lnSpc>
+              <a:buNone/>
+            </a:pPr>
+            <a:endParaRPr kumimoji="0" lang="az-Latn-AZ" altLang="en-US" sz="1200" b="0" i="0" u="none" strike="noStrike" cap="none" normalizeH="0" baseline="0">
+              <a:ln>
+                <a:noFill/>
+              </a:ln>
+              <a:solidFill>
+                <a:schemeClr val="tx1"/>
+              </a:solidFill>
+              <a:effectLst/>
+              <a:latin typeface="Arial" panose="020B0604020202020204" pitchFamily="34" charset="0"/>
+            </a:endParaRPr>
+          </a:p>
+          <a:p>
+            <a:pPr>
+              <a:lnSpc>
+                <a:spcPct val="150000"/>
+              </a:lnSpc>
+              <a:buNone/>
+            </a:pPr>
+            <a:endParaRPr kumimoji="0" lang="az-Latn-AZ" altLang="en-US" sz="1200" b="0" i="0" u="none" strike="noStrike" cap="none" normalizeH="0" baseline="0">
+              <a:ln>
+                <a:noFill/>
+              </a:ln>
+              <a:solidFill>
+                <a:schemeClr val="tx1"/>
+              </a:solidFill>
+              <a:effectLst/>
+              <a:latin typeface="Arial" panose="020B0604020202020204" pitchFamily="34" charset="0"/>
+            </a:endParaRPr>
+          </a:p>
+          <a:p>
+            <a:pPr>
+              <a:lnSpc>
+                <a:spcPct val="150000"/>
+              </a:lnSpc>
+              <a:buNone/>
+            </a:pPr>
+            <a:endParaRPr lang="az-Latn-AZ" altLang="en-US" sz="1200">
+              <a:latin typeface="Arial" panose="020B0604020202020204" pitchFamily="34" charset="0"/>
+            </a:endParaRPr>
+          </a:p>
+          <a:p>
+            <a:pPr>
+              <a:lnSpc>
+                <a:spcPct val="150000"/>
+              </a:lnSpc>
+              <a:buNone/>
+            </a:pPr>
+            <a:r>
+              <a:rPr kumimoji="0" lang="en-US" altLang="en-US" sz="1200" b="0" i="0" u="none" strike="noStrike" cap="none" normalizeH="0" baseline="0">
+                <a:ln>
+                  <a:noFill/>
+                </a:ln>
+                <a:solidFill>
+                  <a:schemeClr val="tx1"/>
+                </a:solidFill>
+                <a:effectLst/>
+                <a:latin typeface="Arial" panose="020B0604020202020204" pitchFamily="34" charset="0"/>
+              </a:rPr>
+              <a:t>Flash məlumatı əldə etmək üçün </a:t>
+            </a:r>
+            <a:r>
+              <a:rPr kumimoji="0" lang="en-US" altLang="en-US" sz="1200" b="1" i="0" u="none" strike="noStrike" cap="none" normalizeH="0" baseline="0">
+                <a:ln>
+                  <a:noFill/>
+                </a:ln>
+                <a:solidFill>
+                  <a:srgbClr val="FF0000"/>
+                </a:solidFill>
+                <a:effectLst/>
+                <a:latin typeface="Arial" panose="020B0604020202020204" pitchFamily="34" charset="0"/>
+              </a:rPr>
+              <a:t>session('status')</a:t>
+            </a:r>
+            <a:r>
+              <a:rPr kumimoji="0" lang="en-US" altLang="en-US" sz="1200" b="0" i="0" u="none" strike="noStrike" cap="none" normalizeH="0" baseline="0">
+                <a:ln>
+                  <a:noFill/>
+                </a:ln>
+                <a:solidFill>
+                  <a:schemeClr val="tx1"/>
+                </a:solidFill>
+                <a:effectLst/>
+                <a:latin typeface="Arial" panose="020B0604020202020204" pitchFamily="34" charset="0"/>
+              </a:rPr>
+              <a:t>, </a:t>
+            </a:r>
+            <a:r>
+              <a:rPr kumimoji="0" lang="en-US" altLang="en-US" sz="1200" b="1" i="0" u="none" strike="noStrike" cap="none" normalizeH="0" baseline="0">
+                <a:ln>
+                  <a:noFill/>
+                </a:ln>
+                <a:solidFill>
+                  <a:srgbClr val="FF0000"/>
+                </a:solidFill>
+                <a:effectLst/>
+                <a:latin typeface="Arial" panose="020B0604020202020204" pitchFamily="34" charset="0"/>
+              </a:rPr>
+              <a:t>$request-&gt;session()-&gt;get('status') </a:t>
+            </a:r>
+            <a:r>
+              <a:rPr kumimoji="0" lang="en-US" altLang="en-US" sz="1200" b="0" i="0" u="none" strike="noStrike" cap="none" normalizeH="0" baseline="0">
+                <a:ln>
+                  <a:noFill/>
+                </a:ln>
+                <a:solidFill>
+                  <a:schemeClr val="tx1"/>
+                </a:solidFill>
+                <a:effectLst/>
+                <a:latin typeface="Arial" panose="020B0604020202020204" pitchFamily="34" charset="0"/>
+              </a:rPr>
+              <a:t>və ya </a:t>
+            </a:r>
+            <a:r>
+              <a:rPr kumimoji="0" lang="en-US" altLang="en-US" sz="1200" b="1" i="0" u="none" strike="noStrike" cap="none" normalizeH="0" baseline="0">
+                <a:ln>
+                  <a:noFill/>
+                </a:ln>
+                <a:solidFill>
+                  <a:srgbClr val="FF0000"/>
+                </a:solidFill>
+                <a:effectLst/>
+                <a:latin typeface="Arial" panose="020B0604020202020204" pitchFamily="34" charset="0"/>
+              </a:rPr>
+              <a:t>old() </a:t>
+            </a:r>
+            <a:r>
+              <a:rPr kumimoji="0" lang="en-US" altLang="en-US" sz="1200" b="0" i="0" u="none" strike="noStrike" cap="none" normalizeH="0" baseline="0">
+                <a:ln>
+                  <a:noFill/>
+                </a:ln>
+                <a:solidFill>
+                  <a:schemeClr val="tx1"/>
+                </a:solidFill>
+                <a:effectLst/>
+                <a:latin typeface="Arial" panose="020B0604020202020204" pitchFamily="34" charset="0"/>
+              </a:rPr>
+              <a:t>metodlarından istifadə edə bilərsən.</a:t>
+            </a:r>
+            <a:endParaRPr kumimoji="0" lang="az-Latn-AZ" altLang="en-US" sz="1200" b="0" i="0" u="none" strike="noStrike" cap="none" normalizeH="0" baseline="0">
+              <a:ln>
+                <a:noFill/>
+              </a:ln>
+              <a:solidFill>
+                <a:schemeClr val="tx1"/>
+              </a:solidFill>
+              <a:effectLst/>
+              <a:latin typeface="Arial" panose="020B0604020202020204" pitchFamily="34" charset="0"/>
+            </a:endParaRPr>
+          </a:p>
+          <a:p>
+            <a:pPr>
+              <a:lnSpc>
+                <a:spcPct val="150000"/>
+              </a:lnSpc>
+              <a:buNone/>
+            </a:pPr>
+            <a:endParaRPr lang="az-Latn-AZ" altLang="en-US" sz="1200">
+              <a:latin typeface="Arial" panose="020B0604020202020204" pitchFamily="34" charset="0"/>
+            </a:endParaRPr>
+          </a:p>
+          <a:p>
+            <a:pPr>
+              <a:lnSpc>
+                <a:spcPct val="150000"/>
+              </a:lnSpc>
+              <a:buNone/>
+            </a:pPr>
+            <a:r>
+              <a:rPr kumimoji="0" lang="en-US" altLang="en-US" sz="1200" b="0" i="0" u="none" strike="noStrike" cap="none" normalizeH="0" baseline="0">
+                <a:ln>
+                  <a:noFill/>
+                </a:ln>
+                <a:solidFill>
+                  <a:schemeClr val="tx1"/>
+                </a:solidFill>
+                <a:effectLst/>
+                <a:latin typeface="Arial" panose="020B0604020202020204" pitchFamily="34" charset="0"/>
+              </a:rPr>
+              <a:t>Flash session data istifadəçinin qarşısına bir dəfəlik mesajlar çıxarmaq üçün mükəmməldir. Bu üsul müvəqqəti məlumat ötürmək üçün həm təhlükəsiz, həm də praktiki yoldur.</a:t>
+            </a:r>
+          </a:p>
+        </p:txBody>
+      </p:sp>
+      <p:pic>
+        <p:nvPicPr>
+          <p:cNvPr id="4" name="Picture 3">
+            <a:extLst>
+              <a:ext uri="{FF2B5EF4-FFF2-40B4-BE49-F238E27FC236}">
+                <a16:creationId xmlns:a16="http://schemas.microsoft.com/office/drawing/2014/main" id="{7D2C0105-E5CF-6D61-82F4-D26726AB3DC0}"/>
+              </a:ext>
+            </a:extLst>
+          </p:cNvPr>
+          <p:cNvPicPr>
+            <a:picLocks noChangeAspect="1"/>
+          </p:cNvPicPr>
+          <p:nvPr/>
+        </p:nvPicPr>
+        <p:blipFill>
+          <a:blip r:embed="rId2"/>
+          <a:stretch>
+            <a:fillRect/>
+          </a:stretch>
+        </p:blipFill>
+        <p:spPr>
+          <a:xfrm>
+            <a:off x="217714" y="895949"/>
+            <a:ext cx="5334744" cy="1276528"/>
+          </a:xfrm>
+          <a:prstGeom prst="rect">
+            <a:avLst/>
+          </a:prstGeom>
+        </p:spPr>
+      </p:pic>
+      <p:pic>
+        <p:nvPicPr>
+          <p:cNvPr id="8" name="Picture 7">
+            <a:extLst>
+              <a:ext uri="{FF2B5EF4-FFF2-40B4-BE49-F238E27FC236}">
+                <a16:creationId xmlns:a16="http://schemas.microsoft.com/office/drawing/2014/main" id="{98E4077C-6F7F-0DE6-1B63-C657C21BDC98}"/>
+              </a:ext>
+            </a:extLst>
+          </p:cNvPr>
+          <p:cNvPicPr>
+            <a:picLocks noChangeAspect="1"/>
+          </p:cNvPicPr>
+          <p:nvPr/>
+        </p:nvPicPr>
+        <p:blipFill>
+          <a:blip r:embed="rId3"/>
+          <a:stretch>
+            <a:fillRect/>
+          </a:stretch>
+        </p:blipFill>
+        <p:spPr>
+          <a:xfrm>
+            <a:off x="217715" y="2476368"/>
+            <a:ext cx="5334744" cy="902664"/>
+          </a:xfrm>
+          <a:prstGeom prst="rect">
+            <a:avLst/>
+          </a:prstGeom>
+        </p:spPr>
+      </p:pic>
+      <p:pic>
+        <p:nvPicPr>
+          <p:cNvPr id="10" name="Picture 9">
+            <a:extLst>
+              <a:ext uri="{FF2B5EF4-FFF2-40B4-BE49-F238E27FC236}">
+                <a16:creationId xmlns:a16="http://schemas.microsoft.com/office/drawing/2014/main" id="{2E7D33F1-6C50-3472-1440-C6C56A45ACDA}"/>
+              </a:ext>
+            </a:extLst>
+          </p:cNvPr>
+          <p:cNvPicPr>
+            <a:picLocks noChangeAspect="1"/>
+          </p:cNvPicPr>
+          <p:nvPr/>
+        </p:nvPicPr>
+        <p:blipFill>
+          <a:blip r:embed="rId4"/>
+          <a:stretch>
+            <a:fillRect/>
+          </a:stretch>
+        </p:blipFill>
+        <p:spPr>
+          <a:xfrm>
+            <a:off x="217715" y="3644577"/>
+            <a:ext cx="5334744" cy="1558673"/>
+          </a:xfrm>
+          <a:prstGeom prst="rect">
+            <a:avLst/>
+          </a:prstGeom>
+        </p:spPr>
+      </p:pic>
+    </p:spTree>
+    <p:extLst>
+      <p:ext uri="{BB962C8B-B14F-4D97-AF65-F5344CB8AC3E}">
+        <p14:creationId xmlns:p14="http://schemas.microsoft.com/office/powerpoint/2010/main" val="3366090831"/>
+      </p:ext>
+    </p:extLst>
+  </p:cSld>
+  <p:clrMapOvr>
+    <a:masterClrMapping/>
+  </p:clrMapOvr>
+</p:sld>
+</file>
+
+<file path=ppt/slides/slide5.xml><?xml version="1.0" encoding="utf-8"?>
+<p:sld xmlns:a="http://schemas.openxmlformats.org/drawingml/2006/main" xmlns:r="http://schemas.openxmlformats.org/officeDocument/2006/relationships" xmlns:p="http://schemas.openxmlformats.org/presentationml/2006/main">
+  <p:cSld>
+    <p:spTree>
+      <p:nvGrpSpPr>
+        <p:cNvPr id="1" name="">
+          <a:extLst>
+            <a:ext uri="{FF2B5EF4-FFF2-40B4-BE49-F238E27FC236}">
+              <a16:creationId xmlns:a16="http://schemas.microsoft.com/office/drawing/2014/main" id="{776EAC60-0E77-AED6-8921-07F75D6970EB}"/>
+            </a:ext>
+          </a:extLst>
+        </p:cNvPr>
+        <p:cNvGrpSpPr/>
+        <p:nvPr/>
+      </p:nvGrpSpPr>
+      <p:grpSpPr>
+        <a:xfrm>
+          <a:off x="0" y="0"/>
+          <a:ext cx="0" cy="0"/>
+          <a:chOff x="0" y="0"/>
+          <a:chExt cx="0" cy="0"/>
+        </a:xfrm>
+      </p:grpSpPr>
+      <p:sp>
+        <p:nvSpPr>
+          <p:cNvPr id="3" name="TextBox 2">
+            <a:extLst>
+              <a:ext uri="{FF2B5EF4-FFF2-40B4-BE49-F238E27FC236}">
+                <a16:creationId xmlns:a16="http://schemas.microsoft.com/office/drawing/2014/main" id="{7E024F40-A999-A563-4B63-5EF7EFB8D578}"/>
+              </a:ext>
+            </a:extLst>
+          </p:cNvPr>
+          <p:cNvSpPr txBox="1"/>
+          <p:nvPr/>
+        </p:nvSpPr>
+        <p:spPr>
+          <a:xfrm>
+            <a:off x="217714" y="255046"/>
+            <a:ext cx="11756571" cy="355354"/>
+          </a:xfrm>
+          <a:prstGeom prst="rect">
+            <a:avLst/>
+          </a:prstGeom>
+          <a:noFill/>
+        </p:spPr>
+        <p:txBody>
+          <a:bodyPr wrap="square">
+            <a:spAutoFit/>
+          </a:bodyPr>
+          <a:lstStyle/>
+          <a:p>
+            <a:pPr>
+              <a:lnSpc>
+                <a:spcPct val="150000"/>
+              </a:lnSpc>
+              <a:buNone/>
+            </a:pPr>
+            <a:r>
+              <a:rPr kumimoji="0" lang="en-US" altLang="en-US" sz="1300" b="0" i="0" u="none" strike="noStrike" cap="none" normalizeH="0" baseline="0">
+                <a:ln>
+                  <a:noFill/>
+                </a:ln>
+                <a:solidFill>
+                  <a:schemeClr val="tx1"/>
+                </a:solidFill>
+                <a:effectLst/>
+                <a:latin typeface="Arial" panose="020B0604020202020204" pitchFamily="34" charset="0"/>
+              </a:rPr>
+              <a:t>.</a:t>
+            </a:r>
+          </a:p>
+        </p:txBody>
+      </p:sp>
+    </p:spTree>
+    <p:extLst>
+      <p:ext uri="{BB962C8B-B14F-4D97-AF65-F5344CB8AC3E}">
+        <p14:creationId xmlns:p14="http://schemas.microsoft.com/office/powerpoint/2010/main" val="3098795957"/>
       </p:ext>
     </p:extLst>
   </p:cSld>
